--- a/design/malaysia-study-live/말레이시아유학_1편_사립명문대학.pptx
+++ b/design/malaysia-study-live/말레이시아유학_1편_사립명문대학.pptx
@@ -17,9 +17,10 @@
     <p:sldId id="265" r:id="rId11"/>
     <p:sldId id="266" r:id="rId12"/>
     <p:sldId id="267" r:id="rId13"/>
+    <p:sldId id="268" r:id="rId14"/>
   </p:sldIdLst>
   <p:notesMasterIdLst>
-    <p:notesMasterId r:id="rId14"/>
+    <p:notesMasterId r:id="rId15"/>
   </p:notesMasterIdLst>
   <p:sldSz cx="12192000" cy="6858000"/>
   <p:notesSz cx="6858000" cy="12192000"/>
@@ -601,7 +602,7 @@
           <a:p>
             <a:r>
               <a:rPr lang="en-US" dirty="0"/>
-              <a:t>학부모가 실제로 알고 싶은 숫자는 마지막 행입니다. 직행이냐 파운데이션이냐로 총액이 갈린다는 점을 먼저 말하십시오.</a:t>
+              <a:t>마지막 두 행이 학부모가 가장 궁금해하는 부분입니다. 다만 전공이 먼저입니다.</a:t>
             </a:r>
             <a:endParaRPr lang="en-US" dirty="0"/>
           </a:p>
@@ -689,7 +690,7 @@
           <a:p>
             <a:r>
               <a:rPr lang="en-US" dirty="0"/>
-              <a:t>검정고시 1회(4월)를 잡으면 그해에 들어갑니다. 2회(8월)면 이듬해입니다. 1편은 직행 계열이 있어 2편보다 선택지가 넓습니다.</a:t>
+              <a:t>학부모가 실제로 알고 싶은 숫자는 마지막 행입니다. 직행이냐 파운데이션이냐로 총액이 갈린다는 점을 먼저 말하십시오.</a:t>
             </a:r>
             <a:endParaRPr lang="en-US" dirty="0"/>
           </a:p>
@@ -777,7 +778,7 @@
           <a:p>
             <a:r>
               <a:rPr lang="en-US" dirty="0"/>
-              <a:t>"어디가 더 좋은 학교인가요?"에 순위로 답하지 마시고, "무엇을 할 것인가에 따라 답이 바뀐다"로 되돌리십시오.</a:t>
+              <a:t>검정고시 1회(4월)를 잡으면 그해에 들어갑니다. 2회(8월)면 이듬해입니다. 1편은 직행 계열이 있어 2편보다 선택지가 넓습니다.</a:t>
             </a:r>
             <a:endParaRPr lang="en-US" dirty="0"/>
           </a:p>
@@ -801,6 +802,94 @@
             <a:fld id="{F7021451-1387-4CA6-816F-3879F97B5CBC}" type="slidenum">
               <a:rPr lang="en-US"/>
               <a:t>12</a:t>
+            </a:fld>
+            <a:endParaRPr lang="en-US"/>
+          </a:p>
+        </p:txBody>
+      </p:sp>
+    </p:spTree>
+    <p:extLst>
+      <p:ext uri="{BB962C8B-B14F-4D97-AF65-F5344CB8AC3E}">
+        <p14:creationId xmlns:p14="http://schemas.microsoft.com/office/powerpoint/2010/main" val="1024086991"/>
+      </p:ext>
+    </p:extLst>
+  </p:cSld>
+  <p:clrMapOvr>
+    <a:masterClrMapping/>
+  </p:clrMapOvr>
+</p:notes>
+</file>
+
+<file path=ppt/notesSlides/notesSlide13.xml><?xml version="1.0" encoding="utf-8"?>
+<p:notes xmlns:a="http://schemas.openxmlformats.org/drawingml/2006/main" xmlns:r="http://schemas.openxmlformats.org/officeDocument/2006/relationships" xmlns:p="http://schemas.openxmlformats.org/presentationml/2006/main">
+  <p:cSld>
+    <p:spTree>
+      <p:nvGrpSpPr>
+        <p:cNvPr id="1" name=""/>
+        <p:cNvGrpSpPr/>
+        <p:nvPr/>
+      </p:nvGrpSpPr>
+      <p:grpSpPr>
+        <a:xfrm>
+          <a:off x="0" y="0"/>
+          <a:ext cx="0" cy="0"/>
+          <a:chOff x="0" y="0"/>
+          <a:chExt cx="0" cy="0"/>
+        </a:xfrm>
+      </p:grpSpPr>
+      <p:sp>
+        <p:nvSpPr>
+          <p:cNvPr id="2" name="Slide Image Placeholder 1"/>
+          <p:cNvSpPr>
+            <a:spLocks noGrp="1" noRot="1" noChangeAspect="1"/>
+          </p:cNvSpPr>
+          <p:nvPr>
+            <p:ph type="sldImg"/>
+          </p:nvPr>
+        </p:nvSpPr>
+        <p:spPr/>
+      </p:sp>
+      <p:sp>
+        <p:nvSpPr>
+          <p:cNvPr id="3" name="Notes Placeholder 2"/>
+          <p:cNvSpPr>
+            <a:spLocks noGrp="1"/>
+          </p:cNvSpPr>
+          <p:nvPr>
+            <p:ph type="body" idx="1"/>
+          </p:nvPr>
+        </p:nvSpPr>
+        <p:spPr/>
+        <p:txBody>
+          <a:bodyPr/>
+          <a:lstStyle/>
+          <a:p>
+            <a:r>
+              <a:rPr lang="en-US" dirty="0"/>
+              <a:t>"어디가 더 좋은 학교인가요?"에 순위로 답하지 마시고, "무엇을 할 것인가에 따라 답이 바뀐다"로 되돌리십시오.</a:t>
+            </a:r>
+            <a:endParaRPr lang="en-US" dirty="0"/>
+          </a:p>
+        </p:txBody>
+      </p:sp>
+      <p:sp>
+        <p:nvSpPr>
+          <p:cNvPr id="4" name="Slide Number Placeholder 3"/>
+          <p:cNvSpPr>
+            <a:spLocks noGrp="1"/>
+          </p:cNvSpPr>
+          <p:nvPr>
+            <p:ph type="sldNum" sz="quarter" idx="10"/>
+          </p:nvPr>
+        </p:nvSpPr>
+        <p:spPr/>
+        <p:txBody>
+          <a:bodyPr/>
+          <a:lstStyle/>
+          <a:p>
+            <a:fld id="{F7021451-1387-4CA6-816F-3879F97B5CBC}" type="slidenum">
+              <a:rPr lang="en-US"/>
+              <a:t>13</a:t>
             </a:fld>
             <a:endParaRPr lang="en-US"/>
           </a:p>
@@ -1481,7 +1570,7 @@
           <a:p>
             <a:r>
               <a:rPr lang="en-US" dirty="0"/>
-              <a:t>마지막 두 행이 학부모가 가장 궁금해하는 부분입니다. 다만 전공이 먼저입니다.</a:t>
+              <a:t>1편 기준이라 테일러스·선웨이를 먼저 뒀습니다. 선웨이만 학위증이 두 장이라는 점이 공학 상담의 결정타입니다.</a:t>
             </a:r>
             <a:endParaRPr lang="en-US" dirty="0"/>
           </a:p>
@@ -2446,6 +2535,2361 @@
                 <a:ea typeface="맑은 고딕" pitchFamily="34" charset="-122"/>
                 <a:cs typeface="맑은 고딕" pitchFamily="34" charset="-120"/>
               </a:rPr>
+              <a:t>SIDE BY SIDE</a:t>
+            </a:r>
+            <a:endParaRPr lang="en-US" sz="1100" dirty="0"/>
+          </a:p>
+        </p:txBody>
+      </p:sp>
+      <p:sp>
+        <p:nvSpPr>
+          <p:cNvPr id="5" name="Text 3"/>
+          <p:cNvSpPr txBox="1"/>
+          <p:nvPr/>
+        </p:nvSpPr>
+        <p:spPr>
+          <a:xfrm>
+            <a:off x="1389888" y="676656"/>
+            <a:ext cx="10161727" cy="512064"/>
+          </a:xfrm>
+          <a:prstGeom prst="rect">
+            <a:avLst/>
+          </a:prstGeom>
+          <a:noFill/>
+          <a:ln/>
+        </p:spPr>
+        <p:txBody>
+          <a:bodyPr wrap="square" lIns="0" tIns="0" rIns="0" bIns="0" rtlCol="0" anchor="t"/>
+          <a:lstStyle/>
+          <a:p>
+            <a:pPr algn="l" indent="0" marL="0">
+              <a:lnSpc>
+                <a:spcPct val="110000"/>
+              </a:lnSpc>
+              <a:buNone/>
+            </a:pPr>
+            <a:r>
+              <a:rPr lang="en-US" sz="3000" b="1" dirty="0">
+                <a:solidFill>
+                  <a:srgbClr val="0C2E2C"/>
+                </a:solidFill>
+                <a:latin typeface="맑은 고딕" pitchFamily="34" charset="0"/>
+                <a:ea typeface="맑은 고딕" pitchFamily="34" charset="-122"/>
+                <a:cs typeface="맑은 고딕" pitchFamily="34" charset="-120"/>
+              </a:rPr>
+              <a:t>테일러스 vs 선웨이</a:t>
+            </a:r>
+            <a:endParaRPr lang="en-US" sz="3000" dirty="0"/>
+          </a:p>
+        </p:txBody>
+      </p:sp>
+      <p:sp>
+        <p:nvSpPr>
+          <p:cNvPr id="6" name="Text 4"/>
+          <p:cNvSpPr txBox="1"/>
+          <p:nvPr/>
+        </p:nvSpPr>
+        <p:spPr>
+          <a:xfrm>
+            <a:off x="640080" y="1225296"/>
+            <a:ext cx="10911535" cy="530352"/>
+          </a:xfrm>
+          <a:prstGeom prst="rect">
+            <a:avLst/>
+          </a:prstGeom>
+          <a:noFill/>
+          <a:ln/>
+        </p:spPr>
+        <p:txBody>
+          <a:bodyPr wrap="square" lIns="0" tIns="0" rIns="0" bIns="0" rtlCol="0" anchor="t"/>
+          <a:lstStyle/>
+          <a:p>
+            <a:pPr algn="l" indent="0" marL="0">
+              <a:lnSpc>
+                <a:spcPct val="130000"/>
+              </a:lnSpc>
+              <a:buNone/>
+            </a:pPr>
+            <a:r>
+              <a:rPr lang="en-US" sz="1300" dirty="0">
+                <a:solidFill>
+                  <a:srgbClr val="6E7C7A"/>
+                </a:solidFill>
+                <a:latin typeface="맑은 고딕" pitchFamily="34" charset="0"/>
+                <a:ea typeface="맑은 고딕" pitchFamily="34" charset="-122"/>
+                <a:cs typeface="맑은 고딕" pitchFamily="34" charset="-120"/>
+              </a:rPr>
+              <a:t>어느 쪽이 좋은 학교인가가 아니라, 어느 쪽이 이 학생에게 맞는가</a:t>
+            </a:r>
+            <a:endParaRPr lang="en-US" sz="1300" dirty="0"/>
+          </a:p>
+        </p:txBody>
+      </p:sp>
+      <p:graphicFrame>
+        <p:nvGraphicFramePr>
+          <p:cNvPr id="11" name="Table 0"/>
+          <p:cNvGraphicFramePr>
+            <a:graphicFrameLocks noGrp="1"/>
+          </p:cNvGraphicFramePr>
+          <p:nvPr>
+            <p:extLst>
+              <p:ext uri="{D42A27DB-BD31-4B8C-83A1-F6EECF244321}">
+                <p14:modId xmlns:p14="http://schemas.microsoft.com/office/powerpoint/2010/main" val="1579011935"/>
+              </p:ext>
+            </p:extLst>
+          </p:nvPr>
+        </p:nvGraphicFramePr>
+        <p:xfrm>
+          <a:off x="640080" y="1810512"/>
+          <a:ext cx="10911535" cy="914400"/>
+        </p:xfrm>
+        <a:graphic>
+          <a:graphicData uri="http://schemas.openxmlformats.org/drawingml/2006/table">
+            <a:tbl>
+              <a:tblPr/>
+              <a:tblGrid>
+                <a:gridCol w="2377440"/>
+                <a:gridCol w="4267048"/>
+                <a:gridCol w="4267048"/>
+              </a:tblGrid>
+              <a:tr h="429768">
+                <a:tc>
+                  <a:txBody>
+                    <a:bodyPr/>
+                    <a:lstStyle/>
+                    <a:p>
+                      <a:pPr indent="0" marL="0">
+                        <a:buNone/>
+                      </a:pPr>
+                      <a:r>
+                        <a:rPr lang="en-US" sz="1200" b="1" dirty="0">
+                          <a:solidFill>
+                            <a:srgbClr val="FFFFFF"/>
+                          </a:solidFill>
+                          <a:latin typeface="맑은 고딕" pitchFamily="34" charset="0"/>
+                          <a:ea typeface="맑은 고딕" pitchFamily="34" charset="-122"/>
+                          <a:cs typeface="맑은 고딕" pitchFamily="34" charset="-120"/>
+                        </a:rPr>
+                        <a:t>기준</a:t>
+                      </a:r>
+                      <a:endParaRPr lang="en-US" sz="1200" dirty="0">
+                        <a:latin typeface="맑은 고딕" charset="0"/>
+                        <a:ea typeface="맑은 고딕" charset="0"/>
+                        <a:cs typeface="맑은 고딕" charset="0"/>
+                      </a:endParaRPr>
+                    </a:p>
+                  </a:txBody>
+                  <a:tcPr marL="88900" marR="88900" marT="50800" marB="50800" anchor="ctr">
+                    <a:lnL w="6350" cap="flat" cmpd="sng" algn="ctr">
+                      <a:solidFill>
+                        <a:srgbClr val="DCD6C9"/>
+                      </a:solidFill>
+                      <a:prstDash val="solid"/>
+                      <a:round/>
+                      <a:headEnd type="none" w="med" len="med"/>
+                      <a:tailEnd type="none" w="med" len="med"/>
+                    </a:lnL>
+                    <a:lnR w="6350" cap="flat" cmpd="sng" algn="ctr">
+                      <a:solidFill>
+                        <a:srgbClr val="DCD6C9"/>
+                      </a:solidFill>
+                      <a:prstDash val="solid"/>
+                      <a:round/>
+                      <a:headEnd type="none" w="med" len="med"/>
+                      <a:tailEnd type="none" w="med" len="med"/>
+                    </a:lnR>
+                    <a:lnT w="6350" cap="flat" cmpd="sng" algn="ctr">
+                      <a:solidFill>
+                        <a:srgbClr val="DCD6C9"/>
+                      </a:solidFill>
+                      <a:prstDash val="solid"/>
+                      <a:round/>
+                      <a:headEnd type="none" w="med" len="med"/>
+                      <a:tailEnd type="none" w="med" len="med"/>
+                    </a:lnT>
+                    <a:lnB w="6350" cap="flat" cmpd="sng" algn="ctr">
+                      <a:solidFill>
+                        <a:srgbClr val="DCD6C9"/>
+                      </a:solidFill>
+                      <a:prstDash val="solid"/>
+                      <a:round/>
+                      <a:headEnd type="none" w="med" len="med"/>
+                      <a:tailEnd type="none" w="med" len="med"/>
+                    </a:lnB>
+                    <a:solidFill>
+                      <a:srgbClr val="134744"/>
+                    </a:solidFill>
+                  </a:tcPr>
+                </a:tc>
+                <a:tc>
+                  <a:txBody>
+                    <a:bodyPr/>
+                    <a:lstStyle/>
+                    <a:p>
+                      <a:pPr indent="0" marL="0">
+                        <a:buNone/>
+                      </a:pPr>
+                      <a:r>
+                        <a:rPr lang="en-US" sz="1200" b="1" dirty="0">
+                          <a:solidFill>
+                            <a:srgbClr val="FFFFFF"/>
+                          </a:solidFill>
+                          <a:latin typeface="맑은 고딕" pitchFamily="34" charset="0"/>
+                          <a:ea typeface="맑은 고딕" pitchFamily="34" charset="-122"/>
+                          <a:cs typeface="맑은 고딕" pitchFamily="34" charset="-120"/>
+                        </a:rPr>
+                        <a:t>테일러스</a:t>
+                      </a:r>
+                      <a:endParaRPr lang="en-US" sz="1200" dirty="0">
+                        <a:latin typeface="맑은 고딕" charset="0"/>
+                        <a:ea typeface="맑은 고딕" charset="0"/>
+                        <a:cs typeface="맑은 고딕" charset="0"/>
+                      </a:endParaRPr>
+                    </a:p>
+                  </a:txBody>
+                  <a:tcPr marL="88900" marR="88900" marT="50800" marB="50800" anchor="ctr">
+                    <a:lnL w="6350" cap="flat" cmpd="sng" algn="ctr">
+                      <a:solidFill>
+                        <a:srgbClr val="DCD6C9"/>
+                      </a:solidFill>
+                      <a:prstDash val="solid"/>
+                      <a:round/>
+                      <a:headEnd type="none" w="med" len="med"/>
+                      <a:tailEnd type="none" w="med" len="med"/>
+                    </a:lnL>
+                    <a:lnR w="6350" cap="flat" cmpd="sng" algn="ctr">
+                      <a:solidFill>
+                        <a:srgbClr val="DCD6C9"/>
+                      </a:solidFill>
+                      <a:prstDash val="solid"/>
+                      <a:round/>
+                      <a:headEnd type="none" w="med" len="med"/>
+                      <a:tailEnd type="none" w="med" len="med"/>
+                    </a:lnR>
+                    <a:lnT w="6350" cap="flat" cmpd="sng" algn="ctr">
+                      <a:solidFill>
+                        <a:srgbClr val="DCD6C9"/>
+                      </a:solidFill>
+                      <a:prstDash val="solid"/>
+                      <a:round/>
+                      <a:headEnd type="none" w="med" len="med"/>
+                      <a:tailEnd type="none" w="med" len="med"/>
+                    </a:lnT>
+                    <a:lnB w="6350" cap="flat" cmpd="sng" algn="ctr">
+                      <a:solidFill>
+                        <a:srgbClr val="DCD6C9"/>
+                      </a:solidFill>
+                      <a:prstDash val="solid"/>
+                      <a:round/>
+                      <a:headEnd type="none" w="med" len="med"/>
+                      <a:tailEnd type="none" w="med" len="med"/>
+                    </a:lnB>
+                    <a:solidFill>
+                      <a:srgbClr val="134744"/>
+                    </a:solidFill>
+                  </a:tcPr>
+                </a:tc>
+                <a:tc>
+                  <a:txBody>
+                    <a:bodyPr/>
+                    <a:lstStyle/>
+                    <a:p>
+                      <a:pPr indent="0" marL="0">
+                        <a:buNone/>
+                      </a:pPr>
+                      <a:r>
+                        <a:rPr lang="en-US" sz="1200" b="1" dirty="0">
+                          <a:solidFill>
+                            <a:srgbClr val="FFFFFF"/>
+                          </a:solidFill>
+                          <a:latin typeface="맑은 고딕" pitchFamily="34" charset="0"/>
+                          <a:ea typeface="맑은 고딕" pitchFamily="34" charset="-122"/>
+                          <a:cs typeface="맑은 고딕" pitchFamily="34" charset="-120"/>
+                        </a:rPr>
+                        <a:t>선웨이</a:t>
+                      </a:r>
+                      <a:endParaRPr lang="en-US" sz="1200" dirty="0">
+                        <a:latin typeface="맑은 고딕" charset="0"/>
+                        <a:ea typeface="맑은 고딕" charset="0"/>
+                        <a:cs typeface="맑은 고딕" charset="0"/>
+                      </a:endParaRPr>
+                    </a:p>
+                  </a:txBody>
+                  <a:tcPr marL="88900" marR="88900" marT="50800" marB="50800" anchor="ctr">
+                    <a:lnL w="6350" cap="flat" cmpd="sng" algn="ctr">
+                      <a:solidFill>
+                        <a:srgbClr val="DCD6C9"/>
+                      </a:solidFill>
+                      <a:prstDash val="solid"/>
+                      <a:round/>
+                      <a:headEnd type="none" w="med" len="med"/>
+                      <a:tailEnd type="none" w="med" len="med"/>
+                    </a:lnL>
+                    <a:lnR w="6350" cap="flat" cmpd="sng" algn="ctr">
+                      <a:solidFill>
+                        <a:srgbClr val="DCD6C9"/>
+                      </a:solidFill>
+                      <a:prstDash val="solid"/>
+                      <a:round/>
+                      <a:headEnd type="none" w="med" len="med"/>
+                      <a:tailEnd type="none" w="med" len="med"/>
+                    </a:lnR>
+                    <a:lnT w="6350" cap="flat" cmpd="sng" algn="ctr">
+                      <a:solidFill>
+                        <a:srgbClr val="DCD6C9"/>
+                      </a:solidFill>
+                      <a:prstDash val="solid"/>
+                      <a:round/>
+                      <a:headEnd type="none" w="med" len="med"/>
+                      <a:tailEnd type="none" w="med" len="med"/>
+                    </a:lnT>
+                    <a:lnB w="6350" cap="flat" cmpd="sng" algn="ctr">
+                      <a:solidFill>
+                        <a:srgbClr val="DCD6C9"/>
+                      </a:solidFill>
+                      <a:prstDash val="solid"/>
+                      <a:round/>
+                      <a:headEnd type="none" w="med" len="med"/>
+                      <a:tailEnd type="none" w="med" len="med"/>
+                    </a:lnB>
+                    <a:solidFill>
+                      <a:srgbClr val="134744"/>
+                    </a:solidFill>
+                  </a:tcPr>
+                </a:tc>
+              </a:tr>
+              <a:tr h="429768">
+                <a:tc>
+                  <a:txBody>
+                    <a:bodyPr/>
+                    <a:lstStyle/>
+                    <a:p>
+                      <a:pPr indent="0" marL="0">
+                        <a:buNone/>
+                      </a:pPr>
+                      <a:r>
+                        <a:rPr lang="en-US" sz="1200" dirty="0">
+                          <a:solidFill>
+                            <a:srgbClr val="1B2426"/>
+                          </a:solidFill>
+                          <a:latin typeface="맑은 고딕" pitchFamily="34" charset="0"/>
+                          <a:ea typeface="맑은 고딕" pitchFamily="34" charset="-122"/>
+                          <a:cs typeface="맑은 고딕" pitchFamily="34" charset="-120"/>
+                        </a:rPr>
+                        <a:t>설립</a:t>
+                      </a:r>
+                      <a:endParaRPr lang="en-US" sz="1200" dirty="0">
+                        <a:latin typeface="맑은 고딕" charset="0"/>
+                        <a:ea typeface="맑은 고딕" charset="0"/>
+                        <a:cs typeface="맑은 고딕" charset="0"/>
+                      </a:endParaRPr>
+                    </a:p>
+                  </a:txBody>
+                  <a:tcPr marL="88900" marR="88900" marT="50800" marB="50800" anchor="ctr">
+                    <a:lnL w="6350" cap="flat" cmpd="sng" algn="ctr">
+                      <a:solidFill>
+                        <a:srgbClr val="DCD6C9"/>
+                      </a:solidFill>
+                      <a:prstDash val="solid"/>
+                      <a:round/>
+                      <a:headEnd type="none" w="med" len="med"/>
+                      <a:tailEnd type="none" w="med" len="med"/>
+                    </a:lnL>
+                    <a:lnR w="6350" cap="flat" cmpd="sng" algn="ctr">
+                      <a:solidFill>
+                        <a:srgbClr val="DCD6C9"/>
+                      </a:solidFill>
+                      <a:prstDash val="solid"/>
+                      <a:round/>
+                      <a:headEnd type="none" w="med" len="med"/>
+                      <a:tailEnd type="none" w="med" len="med"/>
+                    </a:lnR>
+                    <a:lnT w="6350" cap="flat" cmpd="sng" algn="ctr">
+                      <a:solidFill>
+                        <a:srgbClr val="DCD6C9"/>
+                      </a:solidFill>
+                      <a:prstDash val="solid"/>
+                      <a:round/>
+                      <a:headEnd type="none" w="med" len="med"/>
+                      <a:tailEnd type="none" w="med" len="med"/>
+                    </a:lnT>
+                    <a:lnB w="6350" cap="flat" cmpd="sng" algn="ctr">
+                      <a:solidFill>
+                        <a:srgbClr val="DCD6C9"/>
+                      </a:solidFill>
+                      <a:prstDash val="solid"/>
+                      <a:round/>
+                      <a:headEnd type="none" w="med" len="med"/>
+                      <a:tailEnd type="none" w="med" len="med"/>
+                    </a:lnB>
+                    <a:solidFill>
+                      <a:srgbClr val="FFFFFF"/>
+                    </a:solidFill>
+                  </a:tcPr>
+                </a:tc>
+                <a:tc>
+                  <a:txBody>
+                    <a:bodyPr/>
+                    <a:lstStyle/>
+                    <a:p>
+                      <a:pPr indent="0" marL="0">
+                        <a:buNone/>
+                      </a:pPr>
+                      <a:r>
+                        <a:rPr lang="en-US" sz="1200" dirty="0">
+                          <a:solidFill>
+                            <a:srgbClr val="1B2426"/>
+                          </a:solidFill>
+                          <a:latin typeface="맑은 고딕" pitchFamily="34" charset="0"/>
+                          <a:ea typeface="맑은 고딕" pitchFamily="34" charset="-122"/>
+                          <a:cs typeface="맑은 고딕" pitchFamily="34" charset="-120"/>
+                        </a:rPr>
+                        <a:t>1969</a:t>
+                      </a:r>
+                      <a:endParaRPr lang="en-US" sz="1200" dirty="0">
+                        <a:latin typeface="맑은 고딕" charset="0"/>
+                        <a:ea typeface="맑은 고딕" charset="0"/>
+                        <a:cs typeface="맑은 고딕" charset="0"/>
+                      </a:endParaRPr>
+                    </a:p>
+                  </a:txBody>
+                  <a:tcPr marL="88900" marR="88900" marT="50800" marB="50800" anchor="ctr">
+                    <a:lnL w="6350" cap="flat" cmpd="sng" algn="ctr">
+                      <a:solidFill>
+                        <a:srgbClr val="DCD6C9"/>
+                      </a:solidFill>
+                      <a:prstDash val="solid"/>
+                      <a:round/>
+                      <a:headEnd type="none" w="med" len="med"/>
+                      <a:tailEnd type="none" w="med" len="med"/>
+                    </a:lnL>
+                    <a:lnR w="6350" cap="flat" cmpd="sng" algn="ctr">
+                      <a:solidFill>
+                        <a:srgbClr val="DCD6C9"/>
+                      </a:solidFill>
+                      <a:prstDash val="solid"/>
+                      <a:round/>
+                      <a:headEnd type="none" w="med" len="med"/>
+                      <a:tailEnd type="none" w="med" len="med"/>
+                    </a:lnR>
+                    <a:lnT w="6350" cap="flat" cmpd="sng" algn="ctr">
+                      <a:solidFill>
+                        <a:srgbClr val="DCD6C9"/>
+                      </a:solidFill>
+                      <a:prstDash val="solid"/>
+                      <a:round/>
+                      <a:headEnd type="none" w="med" len="med"/>
+                      <a:tailEnd type="none" w="med" len="med"/>
+                    </a:lnT>
+                    <a:lnB w="6350" cap="flat" cmpd="sng" algn="ctr">
+                      <a:solidFill>
+                        <a:srgbClr val="DCD6C9"/>
+                      </a:solidFill>
+                      <a:prstDash val="solid"/>
+                      <a:round/>
+                      <a:headEnd type="none" w="med" len="med"/>
+                      <a:tailEnd type="none" w="med" len="med"/>
+                    </a:lnB>
+                    <a:solidFill>
+                      <a:srgbClr val="FFFFFF"/>
+                    </a:solidFill>
+                  </a:tcPr>
+                </a:tc>
+                <a:tc>
+                  <a:txBody>
+                    <a:bodyPr/>
+                    <a:lstStyle/>
+                    <a:p>
+                      <a:pPr indent="0" marL="0">
+                        <a:buNone/>
+                      </a:pPr>
+                      <a:r>
+                        <a:rPr lang="en-US" sz="1200" dirty="0">
+                          <a:solidFill>
+                            <a:srgbClr val="1B2426"/>
+                          </a:solidFill>
+                          <a:latin typeface="맑은 고딕" pitchFamily="34" charset="0"/>
+                          <a:ea typeface="맑은 고딕" pitchFamily="34" charset="-122"/>
+                          <a:cs typeface="맑은 고딕" pitchFamily="34" charset="-120"/>
+                        </a:rPr>
+                        <a:t>칼리지 1987 → 대학 2011</a:t>
+                      </a:r>
+                      <a:endParaRPr lang="en-US" sz="1200" dirty="0">
+                        <a:latin typeface="맑은 고딕" charset="0"/>
+                        <a:ea typeface="맑은 고딕" charset="0"/>
+                        <a:cs typeface="맑은 고딕" charset="0"/>
+                      </a:endParaRPr>
+                    </a:p>
+                  </a:txBody>
+                  <a:tcPr marL="88900" marR="88900" marT="50800" marB="50800" anchor="ctr">
+                    <a:lnL w="6350" cap="flat" cmpd="sng" algn="ctr">
+                      <a:solidFill>
+                        <a:srgbClr val="DCD6C9"/>
+                      </a:solidFill>
+                      <a:prstDash val="solid"/>
+                      <a:round/>
+                      <a:headEnd type="none" w="med" len="med"/>
+                      <a:tailEnd type="none" w="med" len="med"/>
+                    </a:lnL>
+                    <a:lnR w="6350" cap="flat" cmpd="sng" algn="ctr">
+                      <a:solidFill>
+                        <a:srgbClr val="DCD6C9"/>
+                      </a:solidFill>
+                      <a:prstDash val="solid"/>
+                      <a:round/>
+                      <a:headEnd type="none" w="med" len="med"/>
+                      <a:tailEnd type="none" w="med" len="med"/>
+                    </a:lnR>
+                    <a:lnT w="6350" cap="flat" cmpd="sng" algn="ctr">
+                      <a:solidFill>
+                        <a:srgbClr val="DCD6C9"/>
+                      </a:solidFill>
+                      <a:prstDash val="solid"/>
+                      <a:round/>
+                      <a:headEnd type="none" w="med" len="med"/>
+                      <a:tailEnd type="none" w="med" len="med"/>
+                    </a:lnT>
+                    <a:lnB w="6350" cap="flat" cmpd="sng" algn="ctr">
+                      <a:solidFill>
+                        <a:srgbClr val="DCD6C9"/>
+                      </a:solidFill>
+                      <a:prstDash val="solid"/>
+                      <a:round/>
+                      <a:headEnd type="none" w="med" len="med"/>
+                      <a:tailEnd type="none" w="med" len="med"/>
+                    </a:lnB>
+                    <a:solidFill>
+                      <a:srgbClr val="FFFFFF"/>
+                    </a:solidFill>
+                  </a:tcPr>
+                </a:tc>
+              </a:tr>
+              <a:tr h="429768">
+                <a:tc>
+                  <a:txBody>
+                    <a:bodyPr/>
+                    <a:lstStyle/>
+                    <a:p>
+                      <a:pPr indent="0" marL="0">
+                        <a:buNone/>
+                      </a:pPr>
+                      <a:r>
+                        <a:rPr lang="en-US" sz="1200" dirty="0">
+                          <a:solidFill>
+                            <a:srgbClr val="1B2426"/>
+                          </a:solidFill>
+                          <a:latin typeface="맑은 고딕" pitchFamily="34" charset="0"/>
+                          <a:ea typeface="맑은 고딕" pitchFamily="34" charset="-122"/>
+                          <a:cs typeface="맑은 고딕" pitchFamily="34" charset="-120"/>
+                        </a:rPr>
+                        <a:t>QS 2027 세계</a:t>
+                      </a:r>
+                      <a:endParaRPr lang="en-US" sz="1200" dirty="0">
+                        <a:latin typeface="맑은 고딕" charset="0"/>
+                        <a:ea typeface="맑은 고딕" charset="0"/>
+                        <a:cs typeface="맑은 고딕" charset="0"/>
+                      </a:endParaRPr>
+                    </a:p>
+                  </a:txBody>
+                  <a:tcPr marL="88900" marR="88900" marT="50800" marB="50800" anchor="ctr">
+                    <a:lnL w="6350" cap="flat" cmpd="sng" algn="ctr">
+                      <a:solidFill>
+                        <a:srgbClr val="DCD6C9"/>
+                      </a:solidFill>
+                      <a:prstDash val="solid"/>
+                      <a:round/>
+                      <a:headEnd type="none" w="med" len="med"/>
+                      <a:tailEnd type="none" w="med" len="med"/>
+                    </a:lnL>
+                    <a:lnR w="6350" cap="flat" cmpd="sng" algn="ctr">
+                      <a:solidFill>
+                        <a:srgbClr val="DCD6C9"/>
+                      </a:solidFill>
+                      <a:prstDash val="solid"/>
+                      <a:round/>
+                      <a:headEnd type="none" w="med" len="med"/>
+                      <a:tailEnd type="none" w="med" len="med"/>
+                    </a:lnR>
+                    <a:lnT w="6350" cap="flat" cmpd="sng" algn="ctr">
+                      <a:solidFill>
+                        <a:srgbClr val="DCD6C9"/>
+                      </a:solidFill>
+                      <a:prstDash val="solid"/>
+                      <a:round/>
+                      <a:headEnd type="none" w="med" len="med"/>
+                      <a:tailEnd type="none" w="med" len="med"/>
+                    </a:lnT>
+                    <a:lnB w="6350" cap="flat" cmpd="sng" algn="ctr">
+                      <a:solidFill>
+                        <a:srgbClr val="DCD6C9"/>
+                      </a:solidFill>
+                      <a:prstDash val="solid"/>
+                      <a:round/>
+                      <a:headEnd type="none" w="med" len="med"/>
+                      <a:tailEnd type="none" w="med" len="med"/>
+                    </a:lnB>
+                    <a:solidFill>
+                      <a:srgbClr val="F1EDE4"/>
+                    </a:solidFill>
+                  </a:tcPr>
+                </a:tc>
+                <a:tc>
+                  <a:txBody>
+                    <a:bodyPr/>
+                    <a:lstStyle/>
+                    <a:p>
+                      <a:pPr indent="0" marL="0">
+                        <a:buNone/>
+                      </a:pPr>
+                      <a:r>
+                        <a:rPr lang="en-US" sz="1200" dirty="0">
+                          <a:solidFill>
+                            <a:srgbClr val="1B2426"/>
+                          </a:solidFill>
+                          <a:latin typeface="맑은 고딕" pitchFamily="34" charset="0"/>
+                          <a:ea typeface="맑은 고딕" pitchFamily="34" charset="-122"/>
+                          <a:cs typeface="맑은 고딕" pitchFamily="34" charset="-120"/>
+                        </a:rPr>
+                        <a:t>272위</a:t>
+                      </a:r>
+                      <a:endParaRPr lang="en-US" sz="1200" dirty="0">
+                        <a:latin typeface="맑은 고딕" charset="0"/>
+                        <a:ea typeface="맑은 고딕" charset="0"/>
+                        <a:cs typeface="맑은 고딕" charset="0"/>
+                      </a:endParaRPr>
+                    </a:p>
+                  </a:txBody>
+                  <a:tcPr marL="88900" marR="88900" marT="50800" marB="50800" anchor="ctr">
+                    <a:lnL w="6350" cap="flat" cmpd="sng" algn="ctr">
+                      <a:solidFill>
+                        <a:srgbClr val="DCD6C9"/>
+                      </a:solidFill>
+                      <a:prstDash val="solid"/>
+                      <a:round/>
+                      <a:headEnd type="none" w="med" len="med"/>
+                      <a:tailEnd type="none" w="med" len="med"/>
+                    </a:lnL>
+                    <a:lnR w="6350" cap="flat" cmpd="sng" algn="ctr">
+                      <a:solidFill>
+                        <a:srgbClr val="DCD6C9"/>
+                      </a:solidFill>
+                      <a:prstDash val="solid"/>
+                      <a:round/>
+                      <a:headEnd type="none" w="med" len="med"/>
+                      <a:tailEnd type="none" w="med" len="med"/>
+                    </a:lnR>
+                    <a:lnT w="6350" cap="flat" cmpd="sng" algn="ctr">
+                      <a:solidFill>
+                        <a:srgbClr val="DCD6C9"/>
+                      </a:solidFill>
+                      <a:prstDash val="solid"/>
+                      <a:round/>
+                      <a:headEnd type="none" w="med" len="med"/>
+                      <a:tailEnd type="none" w="med" len="med"/>
+                    </a:lnT>
+                    <a:lnB w="6350" cap="flat" cmpd="sng" algn="ctr">
+                      <a:solidFill>
+                        <a:srgbClr val="DCD6C9"/>
+                      </a:solidFill>
+                      <a:prstDash val="solid"/>
+                      <a:round/>
+                      <a:headEnd type="none" w="med" len="med"/>
+                      <a:tailEnd type="none" w="med" len="med"/>
+                    </a:lnB>
+                    <a:solidFill>
+                      <a:srgbClr val="F1EDE4"/>
+                    </a:solidFill>
+                  </a:tcPr>
+                </a:tc>
+                <a:tc>
+                  <a:txBody>
+                    <a:bodyPr/>
+                    <a:lstStyle/>
+                    <a:p>
+                      <a:pPr indent="0" marL="0">
+                        <a:buNone/>
+                      </a:pPr>
+                      <a:r>
+                        <a:rPr lang="en-US" sz="1200" dirty="0">
+                          <a:solidFill>
+                            <a:srgbClr val="1B2426"/>
+                          </a:solidFill>
+                          <a:latin typeface="맑은 고딕" pitchFamily="34" charset="0"/>
+                          <a:ea typeface="맑은 고딕" pitchFamily="34" charset="-122"/>
+                          <a:cs typeface="맑은 고딕" pitchFamily="34" charset="-120"/>
+                        </a:rPr>
+                        <a:t>354위 (전년 대비 +50)</a:t>
+                      </a:r>
+                      <a:endParaRPr lang="en-US" sz="1200" dirty="0">
+                        <a:latin typeface="맑은 고딕" charset="0"/>
+                        <a:ea typeface="맑은 고딕" charset="0"/>
+                        <a:cs typeface="맑은 고딕" charset="0"/>
+                      </a:endParaRPr>
+                    </a:p>
+                  </a:txBody>
+                  <a:tcPr marL="88900" marR="88900" marT="50800" marB="50800" anchor="ctr">
+                    <a:lnL w="6350" cap="flat" cmpd="sng" algn="ctr">
+                      <a:solidFill>
+                        <a:srgbClr val="DCD6C9"/>
+                      </a:solidFill>
+                      <a:prstDash val="solid"/>
+                      <a:round/>
+                      <a:headEnd type="none" w="med" len="med"/>
+                      <a:tailEnd type="none" w="med" len="med"/>
+                    </a:lnL>
+                    <a:lnR w="6350" cap="flat" cmpd="sng" algn="ctr">
+                      <a:solidFill>
+                        <a:srgbClr val="DCD6C9"/>
+                      </a:solidFill>
+                      <a:prstDash val="solid"/>
+                      <a:round/>
+                      <a:headEnd type="none" w="med" len="med"/>
+                      <a:tailEnd type="none" w="med" len="med"/>
+                    </a:lnR>
+                    <a:lnT w="6350" cap="flat" cmpd="sng" algn="ctr">
+                      <a:solidFill>
+                        <a:srgbClr val="DCD6C9"/>
+                      </a:solidFill>
+                      <a:prstDash val="solid"/>
+                      <a:round/>
+                      <a:headEnd type="none" w="med" len="med"/>
+                      <a:tailEnd type="none" w="med" len="med"/>
+                    </a:lnT>
+                    <a:lnB w="6350" cap="flat" cmpd="sng" algn="ctr">
+                      <a:solidFill>
+                        <a:srgbClr val="DCD6C9"/>
+                      </a:solidFill>
+                      <a:prstDash val="solid"/>
+                      <a:round/>
+                      <a:headEnd type="none" w="med" len="med"/>
+                      <a:tailEnd type="none" w="med" len="med"/>
+                    </a:lnB>
+                    <a:solidFill>
+                      <a:srgbClr val="F1EDE4"/>
+                    </a:solidFill>
+                  </a:tcPr>
+                </a:tc>
+              </a:tr>
+              <a:tr h="429768">
+                <a:tc>
+                  <a:txBody>
+                    <a:bodyPr/>
+                    <a:lstStyle/>
+                    <a:p>
+                      <a:pPr indent="0" marL="0">
+                        <a:buNone/>
+                      </a:pPr>
+                      <a:r>
+                        <a:rPr lang="en-US" sz="1200" dirty="0">
+                          <a:solidFill>
+                            <a:srgbClr val="1B2426"/>
+                          </a:solidFill>
+                          <a:latin typeface="맑은 고딕" pitchFamily="34" charset="0"/>
+                          <a:ea typeface="맑은 고딕" pitchFamily="34" charset="-122"/>
+                          <a:cs typeface="맑은 고딕" pitchFamily="34" charset="-120"/>
+                        </a:rPr>
+                        <a:t>강세 전공</a:t>
+                      </a:r>
+                      <a:endParaRPr lang="en-US" sz="1200" dirty="0">
+                        <a:latin typeface="맑은 고딕" charset="0"/>
+                        <a:ea typeface="맑은 고딕" charset="0"/>
+                        <a:cs typeface="맑은 고딕" charset="0"/>
+                      </a:endParaRPr>
+                    </a:p>
+                  </a:txBody>
+                  <a:tcPr marL="88900" marR="88900" marT="50800" marB="50800" anchor="ctr">
+                    <a:lnL w="6350" cap="flat" cmpd="sng" algn="ctr">
+                      <a:solidFill>
+                        <a:srgbClr val="DCD6C9"/>
+                      </a:solidFill>
+                      <a:prstDash val="solid"/>
+                      <a:round/>
+                      <a:headEnd type="none" w="med" len="med"/>
+                      <a:tailEnd type="none" w="med" len="med"/>
+                    </a:lnL>
+                    <a:lnR w="6350" cap="flat" cmpd="sng" algn="ctr">
+                      <a:solidFill>
+                        <a:srgbClr val="DCD6C9"/>
+                      </a:solidFill>
+                      <a:prstDash val="solid"/>
+                      <a:round/>
+                      <a:headEnd type="none" w="med" len="med"/>
+                      <a:tailEnd type="none" w="med" len="med"/>
+                    </a:lnR>
+                    <a:lnT w="6350" cap="flat" cmpd="sng" algn="ctr">
+                      <a:solidFill>
+                        <a:srgbClr val="DCD6C9"/>
+                      </a:solidFill>
+                      <a:prstDash val="solid"/>
+                      <a:round/>
+                      <a:headEnd type="none" w="med" len="med"/>
+                      <a:tailEnd type="none" w="med" len="med"/>
+                    </a:lnT>
+                    <a:lnB w="6350" cap="flat" cmpd="sng" algn="ctr">
+                      <a:solidFill>
+                        <a:srgbClr val="DCD6C9"/>
+                      </a:solidFill>
+                      <a:prstDash val="solid"/>
+                      <a:round/>
+                      <a:headEnd type="none" w="med" len="med"/>
+                      <a:tailEnd type="none" w="med" len="med"/>
+                    </a:lnB>
+                    <a:solidFill>
+                      <a:srgbClr val="FFFFFF"/>
+                    </a:solidFill>
+                  </a:tcPr>
+                </a:tc>
+                <a:tc>
+                  <a:txBody>
+                    <a:bodyPr/>
+                    <a:lstStyle/>
+                    <a:p>
+                      <a:pPr indent="0" marL="0">
+                        <a:buNone/>
+                      </a:pPr>
+                      <a:r>
+                        <a:rPr lang="en-US" sz="1200" dirty="0">
+                          <a:solidFill>
+                            <a:srgbClr val="1B2426"/>
+                          </a:solidFill>
+                          <a:latin typeface="맑은 고딕" pitchFamily="34" charset="0"/>
+                          <a:ea typeface="맑은 고딕" pitchFamily="34" charset="-122"/>
+                          <a:cs typeface="맑은 고딕" pitchFamily="34" charset="-120"/>
+                        </a:rPr>
+                        <a:t>호텔·관광 세계 26위, 디자인, 마케팅</a:t>
+                      </a:r>
+                      <a:endParaRPr lang="en-US" sz="1200" dirty="0">
+                        <a:latin typeface="맑은 고딕" charset="0"/>
+                        <a:ea typeface="맑은 고딕" charset="0"/>
+                        <a:cs typeface="맑은 고딕" charset="0"/>
+                      </a:endParaRPr>
+                    </a:p>
+                  </a:txBody>
+                  <a:tcPr marL="88900" marR="88900" marT="50800" marB="50800" anchor="ctr">
+                    <a:lnL w="6350" cap="flat" cmpd="sng" algn="ctr">
+                      <a:solidFill>
+                        <a:srgbClr val="DCD6C9"/>
+                      </a:solidFill>
+                      <a:prstDash val="solid"/>
+                      <a:round/>
+                      <a:headEnd type="none" w="med" len="med"/>
+                      <a:tailEnd type="none" w="med" len="med"/>
+                    </a:lnL>
+                    <a:lnR w="6350" cap="flat" cmpd="sng" algn="ctr">
+                      <a:solidFill>
+                        <a:srgbClr val="DCD6C9"/>
+                      </a:solidFill>
+                      <a:prstDash val="solid"/>
+                      <a:round/>
+                      <a:headEnd type="none" w="med" len="med"/>
+                      <a:tailEnd type="none" w="med" len="med"/>
+                    </a:lnR>
+                    <a:lnT w="6350" cap="flat" cmpd="sng" algn="ctr">
+                      <a:solidFill>
+                        <a:srgbClr val="DCD6C9"/>
+                      </a:solidFill>
+                      <a:prstDash val="solid"/>
+                      <a:round/>
+                      <a:headEnd type="none" w="med" len="med"/>
+                      <a:tailEnd type="none" w="med" len="med"/>
+                    </a:lnT>
+                    <a:lnB w="6350" cap="flat" cmpd="sng" algn="ctr">
+                      <a:solidFill>
+                        <a:srgbClr val="DCD6C9"/>
+                      </a:solidFill>
+                      <a:prstDash val="solid"/>
+                      <a:round/>
+                      <a:headEnd type="none" w="med" len="med"/>
+                      <a:tailEnd type="none" w="med" len="med"/>
+                    </a:lnB>
+                    <a:solidFill>
+                      <a:srgbClr val="FFFFFF"/>
+                    </a:solidFill>
+                  </a:tcPr>
+                </a:tc>
+                <a:tc>
+                  <a:txBody>
+                    <a:bodyPr/>
+                    <a:lstStyle/>
+                    <a:p>
+                      <a:pPr indent="0" marL="0">
+                        <a:buNone/>
+                      </a:pPr>
+                      <a:r>
+                        <a:rPr lang="en-US" sz="1200" dirty="0">
+                          <a:solidFill>
+                            <a:srgbClr val="1B2426"/>
+                          </a:solidFill>
+                          <a:latin typeface="맑은 고딕" pitchFamily="34" charset="0"/>
+                          <a:ea typeface="맑은 고딕" pitchFamily="34" charset="-122"/>
+                          <a:cs typeface="맑은 고딕" pitchFamily="34" charset="-120"/>
+                        </a:rPr>
+                        <a:t>회계·금융, 계리학, 컴퓨터과학</a:t>
+                      </a:r>
+                      <a:endParaRPr lang="en-US" sz="1200" dirty="0">
+                        <a:latin typeface="맑은 고딕" charset="0"/>
+                        <a:ea typeface="맑은 고딕" charset="0"/>
+                        <a:cs typeface="맑은 고딕" charset="0"/>
+                      </a:endParaRPr>
+                    </a:p>
+                  </a:txBody>
+                  <a:tcPr marL="88900" marR="88900" marT="50800" marB="50800" anchor="ctr">
+                    <a:lnL w="6350" cap="flat" cmpd="sng" algn="ctr">
+                      <a:solidFill>
+                        <a:srgbClr val="DCD6C9"/>
+                      </a:solidFill>
+                      <a:prstDash val="solid"/>
+                      <a:round/>
+                      <a:headEnd type="none" w="med" len="med"/>
+                      <a:tailEnd type="none" w="med" len="med"/>
+                    </a:lnL>
+                    <a:lnR w="6350" cap="flat" cmpd="sng" algn="ctr">
+                      <a:solidFill>
+                        <a:srgbClr val="DCD6C9"/>
+                      </a:solidFill>
+                      <a:prstDash val="solid"/>
+                      <a:round/>
+                      <a:headEnd type="none" w="med" len="med"/>
+                      <a:tailEnd type="none" w="med" len="med"/>
+                    </a:lnR>
+                    <a:lnT w="6350" cap="flat" cmpd="sng" algn="ctr">
+                      <a:solidFill>
+                        <a:srgbClr val="DCD6C9"/>
+                      </a:solidFill>
+                      <a:prstDash val="solid"/>
+                      <a:round/>
+                      <a:headEnd type="none" w="med" len="med"/>
+                      <a:tailEnd type="none" w="med" len="med"/>
+                    </a:lnT>
+                    <a:lnB w="6350" cap="flat" cmpd="sng" algn="ctr">
+                      <a:solidFill>
+                        <a:srgbClr val="DCD6C9"/>
+                      </a:solidFill>
+                      <a:prstDash val="solid"/>
+                      <a:round/>
+                      <a:headEnd type="none" w="med" len="med"/>
+                      <a:tailEnd type="none" w="med" len="med"/>
+                    </a:lnB>
+                    <a:solidFill>
+                      <a:srgbClr val="FFFFFF"/>
+                    </a:solidFill>
+                  </a:tcPr>
+                </a:tc>
+              </a:tr>
+              <a:tr h="429768">
+                <a:tc>
+                  <a:txBody>
+                    <a:bodyPr/>
+                    <a:lstStyle/>
+                    <a:p>
+                      <a:pPr indent="0" marL="0">
+                        <a:buNone/>
+                      </a:pPr>
+                      <a:r>
+                        <a:rPr lang="en-US" sz="1200" dirty="0">
+                          <a:solidFill>
+                            <a:srgbClr val="1B2426"/>
+                          </a:solidFill>
+                          <a:latin typeface="맑은 고딕" pitchFamily="34" charset="0"/>
+                          <a:ea typeface="맑은 고딕" pitchFamily="34" charset="-122"/>
+                          <a:cs typeface="맑은 고딕" pitchFamily="34" charset="-120"/>
+                        </a:rPr>
+                        <a:t>전공 폭</a:t>
+                      </a:r>
+                      <a:endParaRPr lang="en-US" sz="1200" dirty="0">
+                        <a:latin typeface="맑은 고딕" charset="0"/>
+                        <a:ea typeface="맑은 고딕" charset="0"/>
+                        <a:cs typeface="맑은 고딕" charset="0"/>
+                      </a:endParaRPr>
+                    </a:p>
+                  </a:txBody>
+                  <a:tcPr marL="88900" marR="88900" marT="50800" marB="50800" anchor="ctr">
+                    <a:lnL w="6350" cap="flat" cmpd="sng" algn="ctr">
+                      <a:solidFill>
+                        <a:srgbClr val="DCD6C9"/>
+                      </a:solidFill>
+                      <a:prstDash val="solid"/>
+                      <a:round/>
+                      <a:headEnd type="none" w="med" len="med"/>
+                      <a:tailEnd type="none" w="med" len="med"/>
+                    </a:lnL>
+                    <a:lnR w="6350" cap="flat" cmpd="sng" algn="ctr">
+                      <a:solidFill>
+                        <a:srgbClr val="DCD6C9"/>
+                      </a:solidFill>
+                      <a:prstDash val="solid"/>
+                      <a:round/>
+                      <a:headEnd type="none" w="med" len="med"/>
+                      <a:tailEnd type="none" w="med" len="med"/>
+                    </a:lnR>
+                    <a:lnT w="6350" cap="flat" cmpd="sng" algn="ctr">
+                      <a:solidFill>
+                        <a:srgbClr val="DCD6C9"/>
+                      </a:solidFill>
+                      <a:prstDash val="solid"/>
+                      <a:round/>
+                      <a:headEnd type="none" w="med" len="med"/>
+                      <a:tailEnd type="none" w="med" len="med"/>
+                    </a:lnT>
+                    <a:lnB w="6350" cap="flat" cmpd="sng" algn="ctr">
+                      <a:solidFill>
+                        <a:srgbClr val="DCD6C9"/>
+                      </a:solidFill>
+                      <a:prstDash val="solid"/>
+                      <a:round/>
+                      <a:headEnd type="none" w="med" len="med"/>
+                      <a:tailEnd type="none" w="med" len="med"/>
+                    </a:lnB>
+                    <a:solidFill>
+                      <a:srgbClr val="F1EDE4"/>
+                    </a:solidFill>
+                  </a:tcPr>
+                </a:tc>
+                <a:tc>
+                  <a:txBody>
+                    <a:bodyPr/>
+                    <a:lstStyle/>
+                    <a:p>
+                      <a:pPr indent="0" marL="0">
+                        <a:buNone/>
+                      </a:pPr>
+                      <a:r>
+                        <a:rPr lang="en-US" sz="1200" dirty="0">
+                          <a:solidFill>
+                            <a:srgbClr val="1B2426"/>
+                          </a:solidFill>
+                          <a:latin typeface="맑은 고딕" pitchFamily="34" charset="0"/>
+                          <a:ea typeface="맑은 고딕" pitchFamily="34" charset="-122"/>
+                          <a:cs typeface="맑은 고딕" pitchFamily="34" charset="-120"/>
+                        </a:rPr>
+                        <a:t>12개 계열 (공연예술·역사까지)</a:t>
+                      </a:r>
+                      <a:endParaRPr lang="en-US" sz="1200" dirty="0">
+                        <a:latin typeface="맑은 고딕" charset="0"/>
+                        <a:ea typeface="맑은 고딕" charset="0"/>
+                        <a:cs typeface="맑은 고딕" charset="0"/>
+                      </a:endParaRPr>
+                    </a:p>
+                  </a:txBody>
+                  <a:tcPr marL="88900" marR="88900" marT="50800" marB="50800" anchor="ctr">
+                    <a:lnL w="6350" cap="flat" cmpd="sng" algn="ctr">
+                      <a:solidFill>
+                        <a:srgbClr val="DCD6C9"/>
+                      </a:solidFill>
+                      <a:prstDash val="solid"/>
+                      <a:round/>
+                      <a:headEnd type="none" w="med" len="med"/>
+                      <a:tailEnd type="none" w="med" len="med"/>
+                    </a:lnL>
+                    <a:lnR w="6350" cap="flat" cmpd="sng" algn="ctr">
+                      <a:solidFill>
+                        <a:srgbClr val="DCD6C9"/>
+                      </a:solidFill>
+                      <a:prstDash val="solid"/>
+                      <a:round/>
+                      <a:headEnd type="none" w="med" len="med"/>
+                      <a:tailEnd type="none" w="med" len="med"/>
+                    </a:lnR>
+                    <a:lnT w="6350" cap="flat" cmpd="sng" algn="ctr">
+                      <a:solidFill>
+                        <a:srgbClr val="DCD6C9"/>
+                      </a:solidFill>
+                      <a:prstDash val="solid"/>
+                      <a:round/>
+                      <a:headEnd type="none" w="med" len="med"/>
+                      <a:tailEnd type="none" w="med" len="med"/>
+                    </a:lnT>
+                    <a:lnB w="6350" cap="flat" cmpd="sng" algn="ctr">
+                      <a:solidFill>
+                        <a:srgbClr val="DCD6C9"/>
+                      </a:solidFill>
+                      <a:prstDash val="solid"/>
+                      <a:round/>
+                      <a:headEnd type="none" w="med" len="med"/>
+                      <a:tailEnd type="none" w="med" len="med"/>
+                    </a:lnB>
+                    <a:solidFill>
+                      <a:srgbClr val="F1EDE4"/>
+                    </a:solidFill>
+                  </a:tcPr>
+                </a:tc>
+                <a:tc>
+                  <a:txBody>
+                    <a:bodyPr/>
+                    <a:lstStyle/>
+                    <a:p>
+                      <a:pPr indent="0" marL="0">
+                        <a:buNone/>
+                      </a:pPr>
+                      <a:r>
+                        <a:rPr lang="en-US" sz="1200" dirty="0">
+                          <a:solidFill>
+                            <a:srgbClr val="1B2426"/>
+                          </a:solidFill>
+                          <a:latin typeface="맑은 고딕" pitchFamily="34" charset="0"/>
+                          <a:ea typeface="맑은 고딕" pitchFamily="34" charset="-122"/>
+                          <a:cs typeface="맑은 고딕" pitchFamily="34" charset="-120"/>
+                        </a:rPr>
+                        <a:t>비즈니스 · CS · STEM 중심</a:t>
+                      </a:r>
+                      <a:endParaRPr lang="en-US" sz="1200" dirty="0">
+                        <a:latin typeface="맑은 고딕" charset="0"/>
+                        <a:ea typeface="맑은 고딕" charset="0"/>
+                        <a:cs typeface="맑은 고딕" charset="0"/>
+                      </a:endParaRPr>
+                    </a:p>
+                  </a:txBody>
+                  <a:tcPr marL="88900" marR="88900" marT="50800" marB="50800" anchor="ctr">
+                    <a:lnL w="6350" cap="flat" cmpd="sng" algn="ctr">
+                      <a:solidFill>
+                        <a:srgbClr val="DCD6C9"/>
+                      </a:solidFill>
+                      <a:prstDash val="solid"/>
+                      <a:round/>
+                      <a:headEnd type="none" w="med" len="med"/>
+                      <a:tailEnd type="none" w="med" len="med"/>
+                    </a:lnL>
+                    <a:lnR w="6350" cap="flat" cmpd="sng" algn="ctr">
+                      <a:solidFill>
+                        <a:srgbClr val="DCD6C9"/>
+                      </a:solidFill>
+                      <a:prstDash val="solid"/>
+                      <a:round/>
+                      <a:headEnd type="none" w="med" len="med"/>
+                      <a:tailEnd type="none" w="med" len="med"/>
+                    </a:lnR>
+                    <a:lnT w="6350" cap="flat" cmpd="sng" algn="ctr">
+                      <a:solidFill>
+                        <a:srgbClr val="DCD6C9"/>
+                      </a:solidFill>
+                      <a:prstDash val="solid"/>
+                      <a:round/>
+                      <a:headEnd type="none" w="med" len="med"/>
+                      <a:tailEnd type="none" w="med" len="med"/>
+                    </a:lnT>
+                    <a:lnB w="6350" cap="flat" cmpd="sng" algn="ctr">
+                      <a:solidFill>
+                        <a:srgbClr val="DCD6C9"/>
+                      </a:solidFill>
+                      <a:prstDash val="solid"/>
+                      <a:round/>
+                      <a:headEnd type="none" w="med" len="med"/>
+                      <a:tailEnd type="none" w="med" len="med"/>
+                    </a:lnB>
+                    <a:solidFill>
+                      <a:srgbClr val="F1EDE4"/>
+                    </a:solidFill>
+                  </a:tcPr>
+                </a:tc>
+              </a:tr>
+              <a:tr h="429768">
+                <a:tc>
+                  <a:txBody>
+                    <a:bodyPr/>
+                    <a:lstStyle/>
+                    <a:p>
+                      <a:pPr indent="0" marL="0">
+                        <a:buNone/>
+                      </a:pPr>
+                      <a:r>
+                        <a:rPr lang="en-US" sz="1200" dirty="0">
+                          <a:solidFill>
+                            <a:srgbClr val="1B2426"/>
+                          </a:solidFill>
+                          <a:latin typeface="맑은 고딕" pitchFamily="34" charset="0"/>
+                          <a:ea typeface="맑은 고딕" pitchFamily="34" charset="-122"/>
+                          <a:cs typeface="맑은 고딕" pitchFamily="34" charset="-120"/>
+                        </a:rPr>
+                        <a:t>직행 가능 계열</a:t>
+                      </a:r>
+                      <a:endParaRPr lang="en-US" sz="1200" dirty="0">
+                        <a:latin typeface="맑은 고딕" charset="0"/>
+                        <a:ea typeface="맑은 고딕" charset="0"/>
+                        <a:cs typeface="맑은 고딕" charset="0"/>
+                      </a:endParaRPr>
+                    </a:p>
+                  </a:txBody>
+                  <a:tcPr marL="88900" marR="88900" marT="50800" marB="50800" anchor="ctr">
+                    <a:lnL w="6350" cap="flat" cmpd="sng" algn="ctr">
+                      <a:solidFill>
+                        <a:srgbClr val="DCD6C9"/>
+                      </a:solidFill>
+                      <a:prstDash val="solid"/>
+                      <a:round/>
+                      <a:headEnd type="none" w="med" len="med"/>
+                      <a:tailEnd type="none" w="med" len="med"/>
+                    </a:lnL>
+                    <a:lnR w="6350" cap="flat" cmpd="sng" algn="ctr">
+                      <a:solidFill>
+                        <a:srgbClr val="DCD6C9"/>
+                      </a:solidFill>
+                      <a:prstDash val="solid"/>
+                      <a:round/>
+                      <a:headEnd type="none" w="med" len="med"/>
+                      <a:tailEnd type="none" w="med" len="med"/>
+                    </a:lnR>
+                    <a:lnT w="6350" cap="flat" cmpd="sng" algn="ctr">
+                      <a:solidFill>
+                        <a:srgbClr val="DCD6C9"/>
+                      </a:solidFill>
+                      <a:prstDash val="solid"/>
+                      <a:round/>
+                      <a:headEnd type="none" w="med" len="med"/>
+                      <a:tailEnd type="none" w="med" len="med"/>
+                    </a:lnT>
+                    <a:lnB w="6350" cap="flat" cmpd="sng" algn="ctr">
+                      <a:solidFill>
+                        <a:srgbClr val="DCD6C9"/>
+                      </a:solidFill>
+                      <a:prstDash val="solid"/>
+                      <a:round/>
+                      <a:headEnd type="none" w="med" len="med"/>
+                      <a:tailEnd type="none" w="med" len="med"/>
+                    </a:lnB>
+                    <a:solidFill>
+                      <a:srgbClr val="FFFFFF"/>
+                    </a:solidFill>
+                  </a:tcPr>
+                </a:tc>
+                <a:tc>
+                  <a:txBody>
+                    <a:bodyPr/>
+                    <a:lstStyle/>
+                    <a:p>
+                      <a:pPr indent="0" marL="0">
+                        <a:buNone/>
+                      </a:pPr>
+                      <a:r>
+                        <a:rPr lang="en-US" sz="1200" dirty="0">
+                          <a:solidFill>
+                            <a:srgbClr val="1B2426"/>
+                          </a:solidFill>
+                          <a:latin typeface="맑은 고딕" pitchFamily="34" charset="0"/>
+                          <a:ea typeface="맑은 고딕" pitchFamily="34" charset="-122"/>
+                          <a:cs typeface="맑은 고딕" pitchFamily="34" charset="-120"/>
+                        </a:rPr>
+                        <a:t>호텔경영·관광, 경영학 전체</a:t>
+                      </a:r>
+                      <a:endParaRPr lang="en-US" sz="1200" dirty="0">
+                        <a:latin typeface="맑은 고딕" charset="0"/>
+                        <a:ea typeface="맑은 고딕" charset="0"/>
+                        <a:cs typeface="맑은 고딕" charset="0"/>
+                      </a:endParaRPr>
+                    </a:p>
+                  </a:txBody>
+                  <a:tcPr marL="88900" marR="88900" marT="50800" marB="50800" anchor="ctr">
+                    <a:lnL w="6350" cap="flat" cmpd="sng" algn="ctr">
+                      <a:solidFill>
+                        <a:srgbClr val="DCD6C9"/>
+                      </a:solidFill>
+                      <a:prstDash val="solid"/>
+                      <a:round/>
+                      <a:headEnd type="none" w="med" len="med"/>
+                      <a:tailEnd type="none" w="med" len="med"/>
+                    </a:lnL>
+                    <a:lnR w="6350" cap="flat" cmpd="sng" algn="ctr">
+                      <a:solidFill>
+                        <a:srgbClr val="DCD6C9"/>
+                      </a:solidFill>
+                      <a:prstDash val="solid"/>
+                      <a:round/>
+                      <a:headEnd type="none" w="med" len="med"/>
+                      <a:tailEnd type="none" w="med" len="med"/>
+                    </a:lnR>
+                    <a:lnT w="6350" cap="flat" cmpd="sng" algn="ctr">
+                      <a:solidFill>
+                        <a:srgbClr val="DCD6C9"/>
+                      </a:solidFill>
+                      <a:prstDash val="solid"/>
+                      <a:round/>
+                      <a:headEnd type="none" w="med" len="med"/>
+                      <a:tailEnd type="none" w="med" len="med"/>
+                    </a:lnT>
+                    <a:lnB w="6350" cap="flat" cmpd="sng" algn="ctr">
+                      <a:solidFill>
+                        <a:srgbClr val="DCD6C9"/>
+                      </a:solidFill>
+                      <a:prstDash val="solid"/>
+                      <a:round/>
+                      <a:headEnd type="none" w="med" len="med"/>
+                      <a:tailEnd type="none" w="med" len="med"/>
+                    </a:lnB>
+                    <a:solidFill>
+                      <a:srgbClr val="FFFFFF"/>
+                    </a:solidFill>
+                  </a:tcPr>
+                </a:tc>
+                <a:tc>
+                  <a:txBody>
+                    <a:bodyPr/>
+                    <a:lstStyle/>
+                    <a:p>
+                      <a:pPr indent="0" marL="0">
+                        <a:buNone/>
+                      </a:pPr>
+                      <a:r>
+                        <a:rPr lang="en-US" sz="1200" dirty="0">
+                          <a:solidFill>
+                            <a:srgbClr val="1B2426"/>
+                          </a:solidFill>
+                          <a:latin typeface="맑은 고딕" pitchFamily="34" charset="0"/>
+                          <a:ea typeface="맑은 고딕" pitchFamily="34" charset="-122"/>
+                          <a:cs typeface="맑은 고딕" pitchFamily="34" charset="-120"/>
+                        </a:rPr>
+                        <a:t>BA 인문사회 전반, BSc 경영·호텔경영</a:t>
+                      </a:r>
+                      <a:endParaRPr lang="en-US" sz="1200" dirty="0">
+                        <a:latin typeface="맑은 고딕" charset="0"/>
+                        <a:ea typeface="맑은 고딕" charset="0"/>
+                        <a:cs typeface="맑은 고딕" charset="0"/>
+                      </a:endParaRPr>
+                    </a:p>
+                  </a:txBody>
+                  <a:tcPr marL="88900" marR="88900" marT="50800" marB="50800" anchor="ctr">
+                    <a:lnL w="6350" cap="flat" cmpd="sng" algn="ctr">
+                      <a:solidFill>
+                        <a:srgbClr val="DCD6C9"/>
+                      </a:solidFill>
+                      <a:prstDash val="solid"/>
+                      <a:round/>
+                      <a:headEnd type="none" w="med" len="med"/>
+                      <a:tailEnd type="none" w="med" len="med"/>
+                    </a:lnL>
+                    <a:lnR w="6350" cap="flat" cmpd="sng" algn="ctr">
+                      <a:solidFill>
+                        <a:srgbClr val="DCD6C9"/>
+                      </a:solidFill>
+                      <a:prstDash val="solid"/>
+                      <a:round/>
+                      <a:headEnd type="none" w="med" len="med"/>
+                      <a:tailEnd type="none" w="med" len="med"/>
+                    </a:lnR>
+                    <a:lnT w="6350" cap="flat" cmpd="sng" algn="ctr">
+                      <a:solidFill>
+                        <a:srgbClr val="DCD6C9"/>
+                      </a:solidFill>
+                      <a:prstDash val="solid"/>
+                      <a:round/>
+                      <a:headEnd type="none" w="med" len="med"/>
+                      <a:tailEnd type="none" w="med" len="med"/>
+                    </a:lnT>
+                    <a:lnB w="6350" cap="flat" cmpd="sng" algn="ctr">
+                      <a:solidFill>
+                        <a:srgbClr val="DCD6C9"/>
+                      </a:solidFill>
+                      <a:prstDash val="solid"/>
+                      <a:round/>
+                      <a:headEnd type="none" w="med" len="med"/>
+                      <a:tailEnd type="none" w="med" len="med"/>
+                    </a:lnB>
+                    <a:solidFill>
+                      <a:srgbClr val="FFFFFF"/>
+                    </a:solidFill>
+                  </a:tcPr>
+                </a:tc>
+              </a:tr>
+              <a:tr h="429768">
+                <a:tc>
+                  <a:txBody>
+                    <a:bodyPr/>
+                    <a:lstStyle/>
+                    <a:p>
+                      <a:pPr indent="0" marL="0">
+                        <a:buNone/>
+                      </a:pPr>
+                      <a:r>
+                        <a:rPr lang="en-US" sz="1200" dirty="0">
+                          <a:solidFill>
+                            <a:srgbClr val="1B2426"/>
+                          </a:solidFill>
+                          <a:latin typeface="맑은 고딕" pitchFamily="34" charset="0"/>
+                          <a:ea typeface="맑은 고딕" pitchFamily="34" charset="-122"/>
+                          <a:cs typeface="맑은 고딕" pitchFamily="34" charset="-120"/>
+                        </a:rPr>
+                        <a:t>해외 학위</a:t>
+                      </a:r>
+                      <a:endParaRPr lang="en-US" sz="1200" dirty="0">
+                        <a:latin typeface="맑은 고딕" charset="0"/>
+                        <a:ea typeface="맑은 고딕" charset="0"/>
+                        <a:cs typeface="맑은 고딕" charset="0"/>
+                      </a:endParaRPr>
+                    </a:p>
+                  </a:txBody>
+                  <a:tcPr marL="88900" marR="88900" marT="50800" marB="50800" anchor="ctr">
+                    <a:lnL w="6350" cap="flat" cmpd="sng" algn="ctr">
+                      <a:solidFill>
+                        <a:srgbClr val="DCD6C9"/>
+                      </a:solidFill>
+                      <a:prstDash val="solid"/>
+                      <a:round/>
+                      <a:headEnd type="none" w="med" len="med"/>
+                      <a:tailEnd type="none" w="med" len="med"/>
+                    </a:lnL>
+                    <a:lnR w="6350" cap="flat" cmpd="sng" algn="ctr">
+                      <a:solidFill>
+                        <a:srgbClr val="DCD6C9"/>
+                      </a:solidFill>
+                      <a:prstDash val="solid"/>
+                      <a:round/>
+                      <a:headEnd type="none" w="med" len="med"/>
+                      <a:tailEnd type="none" w="med" len="med"/>
+                    </a:lnR>
+                    <a:lnT w="6350" cap="flat" cmpd="sng" algn="ctr">
+                      <a:solidFill>
+                        <a:srgbClr val="DCD6C9"/>
+                      </a:solidFill>
+                      <a:prstDash val="solid"/>
+                      <a:round/>
+                      <a:headEnd type="none" w="med" len="med"/>
+                      <a:tailEnd type="none" w="med" len="med"/>
+                    </a:lnT>
+                    <a:lnB w="6350" cap="flat" cmpd="sng" algn="ctr">
+                      <a:solidFill>
+                        <a:srgbClr val="DCD6C9"/>
+                      </a:solidFill>
+                      <a:prstDash val="solid"/>
+                      <a:round/>
+                      <a:headEnd type="none" w="med" len="med"/>
+                      <a:tailEnd type="none" w="med" len="med"/>
+                    </a:lnB>
+                    <a:solidFill>
+                      <a:srgbClr val="F1EDE4"/>
+                    </a:solidFill>
+                  </a:tcPr>
+                </a:tc>
+                <a:tc>
+                  <a:txBody>
+                    <a:bodyPr/>
+                    <a:lstStyle/>
+                    <a:p>
+                      <a:pPr indent="0" marL="0">
+                        <a:buNone/>
+                      </a:pPr>
+                      <a:r>
+                        <a:rPr lang="en-US" sz="1200" dirty="0">
+                          <a:solidFill>
+                            <a:srgbClr val="1B2426"/>
+                          </a:solidFill>
+                          <a:latin typeface="맑은 고딕" pitchFamily="34" charset="0"/>
+                          <a:ea typeface="맑은 고딕" pitchFamily="34" charset="-122"/>
+                          <a:cs typeface="맑은 고딕" pitchFamily="34" charset="-120"/>
+                        </a:rPr>
+                        <a:t>ADTP(1996) · UWE 브리스톨 · QUT</a:t>
+                      </a:r>
+                      <a:endParaRPr lang="en-US" sz="1200" dirty="0">
+                        <a:latin typeface="맑은 고딕" charset="0"/>
+                        <a:ea typeface="맑은 고딕" charset="0"/>
+                        <a:cs typeface="맑은 고딕" charset="0"/>
+                      </a:endParaRPr>
+                    </a:p>
+                  </a:txBody>
+                  <a:tcPr marL="88900" marR="88900" marT="50800" marB="50800" anchor="ctr">
+                    <a:lnL w="6350" cap="flat" cmpd="sng" algn="ctr">
+                      <a:solidFill>
+                        <a:srgbClr val="DCD6C9"/>
+                      </a:solidFill>
+                      <a:prstDash val="solid"/>
+                      <a:round/>
+                      <a:headEnd type="none" w="med" len="med"/>
+                      <a:tailEnd type="none" w="med" len="med"/>
+                    </a:lnL>
+                    <a:lnR w="6350" cap="flat" cmpd="sng" algn="ctr">
+                      <a:solidFill>
+                        <a:srgbClr val="DCD6C9"/>
+                      </a:solidFill>
+                      <a:prstDash val="solid"/>
+                      <a:round/>
+                      <a:headEnd type="none" w="med" len="med"/>
+                      <a:tailEnd type="none" w="med" len="med"/>
+                    </a:lnR>
+                    <a:lnT w="6350" cap="flat" cmpd="sng" algn="ctr">
+                      <a:solidFill>
+                        <a:srgbClr val="DCD6C9"/>
+                      </a:solidFill>
+                      <a:prstDash val="solid"/>
+                      <a:round/>
+                      <a:headEnd type="none" w="med" len="med"/>
+                      <a:tailEnd type="none" w="med" len="med"/>
+                    </a:lnT>
+                    <a:lnB w="6350" cap="flat" cmpd="sng" algn="ctr">
+                      <a:solidFill>
+                        <a:srgbClr val="DCD6C9"/>
+                      </a:solidFill>
+                      <a:prstDash val="solid"/>
+                      <a:round/>
+                      <a:headEnd type="none" w="med" len="med"/>
+                      <a:tailEnd type="none" w="med" len="med"/>
+                    </a:lnB>
+                    <a:solidFill>
+                      <a:srgbClr val="F1EDE4"/>
+                    </a:solidFill>
+                  </a:tcPr>
+                </a:tc>
+                <a:tc>
+                  <a:txBody>
+                    <a:bodyPr/>
+                    <a:lstStyle/>
+                    <a:p>
+                      <a:pPr indent="0" marL="0">
+                        <a:buNone/>
+                      </a:pPr>
+                      <a:r>
+                        <a:rPr lang="en-US" sz="1200" dirty="0">
+                          <a:solidFill>
+                            <a:srgbClr val="1B2426"/>
+                          </a:solidFill>
+                          <a:latin typeface="맑은 고딕" pitchFamily="34" charset="0"/>
+                          <a:ea typeface="맑은 고딕" pitchFamily="34" charset="-122"/>
+                          <a:cs typeface="맑은 고딕" pitchFamily="34" charset="-120"/>
+                        </a:rPr>
+                        <a:t>랭커스터 복수학위(추가비 없음) · ASU · ADTP(1987)</a:t>
+                      </a:r>
+                      <a:endParaRPr lang="en-US" sz="1200" dirty="0">
+                        <a:latin typeface="맑은 고딕" charset="0"/>
+                        <a:ea typeface="맑은 고딕" charset="0"/>
+                        <a:cs typeface="맑은 고딕" charset="0"/>
+                      </a:endParaRPr>
+                    </a:p>
+                  </a:txBody>
+                  <a:tcPr marL="88900" marR="88900" marT="50800" marB="50800" anchor="ctr">
+                    <a:lnL w="6350" cap="flat" cmpd="sng" algn="ctr">
+                      <a:solidFill>
+                        <a:srgbClr val="DCD6C9"/>
+                      </a:solidFill>
+                      <a:prstDash val="solid"/>
+                      <a:round/>
+                      <a:headEnd type="none" w="med" len="med"/>
+                      <a:tailEnd type="none" w="med" len="med"/>
+                    </a:lnL>
+                    <a:lnR w="6350" cap="flat" cmpd="sng" algn="ctr">
+                      <a:solidFill>
+                        <a:srgbClr val="DCD6C9"/>
+                      </a:solidFill>
+                      <a:prstDash val="solid"/>
+                      <a:round/>
+                      <a:headEnd type="none" w="med" len="med"/>
+                      <a:tailEnd type="none" w="med" len="med"/>
+                    </a:lnR>
+                    <a:lnT w="6350" cap="flat" cmpd="sng" algn="ctr">
+                      <a:solidFill>
+                        <a:srgbClr val="DCD6C9"/>
+                      </a:solidFill>
+                      <a:prstDash val="solid"/>
+                      <a:round/>
+                      <a:headEnd type="none" w="med" len="med"/>
+                      <a:tailEnd type="none" w="med" len="med"/>
+                    </a:lnT>
+                    <a:lnB w="6350" cap="flat" cmpd="sng" algn="ctr">
+                      <a:solidFill>
+                        <a:srgbClr val="DCD6C9"/>
+                      </a:solidFill>
+                      <a:prstDash val="solid"/>
+                      <a:round/>
+                      <a:headEnd type="none" w="med" len="med"/>
+                      <a:tailEnd type="none" w="med" len="med"/>
+                    </a:lnB>
+                    <a:solidFill>
+                      <a:srgbClr val="F1EDE4"/>
+                    </a:solidFill>
+                  </a:tcPr>
+                </a:tc>
+              </a:tr>
+              <a:tr h="429768">
+                <a:tc>
+                  <a:txBody>
+                    <a:bodyPr/>
+                    <a:lstStyle/>
+                    <a:p>
+                      <a:pPr indent="0" marL="0">
+                        <a:buNone/>
+                      </a:pPr>
+                      <a:r>
+                        <a:rPr lang="en-US" sz="1200" dirty="0">
+                          <a:solidFill>
+                            <a:srgbClr val="1B2426"/>
+                          </a:solidFill>
+                          <a:latin typeface="맑은 고딕" pitchFamily="34" charset="0"/>
+                          <a:ea typeface="맑은 고딕" pitchFamily="34" charset="-122"/>
+                          <a:cs typeface="맑은 고딕" pitchFamily="34" charset="-120"/>
+                        </a:rPr>
+                        <a:t>학사 입학</a:t>
+                      </a:r>
+                      <a:endParaRPr lang="en-US" sz="1200" dirty="0">
+                        <a:latin typeface="맑은 고딕" charset="0"/>
+                        <a:ea typeface="맑은 고딕" charset="0"/>
+                        <a:cs typeface="맑은 고딕" charset="0"/>
+                      </a:endParaRPr>
+                    </a:p>
+                  </a:txBody>
+                  <a:tcPr marL="88900" marR="88900" marT="50800" marB="50800" anchor="ctr">
+                    <a:lnL w="6350" cap="flat" cmpd="sng" algn="ctr">
+                      <a:solidFill>
+                        <a:srgbClr val="DCD6C9"/>
+                      </a:solidFill>
+                      <a:prstDash val="solid"/>
+                      <a:round/>
+                      <a:headEnd type="none" w="med" len="med"/>
+                      <a:tailEnd type="none" w="med" len="med"/>
+                    </a:lnL>
+                    <a:lnR w="6350" cap="flat" cmpd="sng" algn="ctr">
+                      <a:solidFill>
+                        <a:srgbClr val="DCD6C9"/>
+                      </a:solidFill>
+                      <a:prstDash val="solid"/>
+                      <a:round/>
+                      <a:headEnd type="none" w="med" len="med"/>
+                      <a:tailEnd type="none" w="med" len="med"/>
+                    </a:lnR>
+                    <a:lnT w="6350" cap="flat" cmpd="sng" algn="ctr">
+                      <a:solidFill>
+                        <a:srgbClr val="DCD6C9"/>
+                      </a:solidFill>
+                      <a:prstDash val="solid"/>
+                      <a:round/>
+                      <a:headEnd type="none" w="med" len="med"/>
+                      <a:tailEnd type="none" w="med" len="med"/>
+                    </a:lnT>
+                    <a:lnB w="6350" cap="flat" cmpd="sng" algn="ctr">
+                      <a:solidFill>
+                        <a:srgbClr val="DCD6C9"/>
+                      </a:solidFill>
+                      <a:prstDash val="solid"/>
+                      <a:round/>
+                      <a:headEnd type="none" w="med" len="med"/>
+                      <a:tailEnd type="none" w="med" len="med"/>
+                    </a:lnB>
+                    <a:solidFill>
+                      <a:srgbClr val="FFFFFF"/>
+                    </a:solidFill>
+                  </a:tcPr>
+                </a:tc>
+                <a:tc>
+                  <a:txBody>
+                    <a:bodyPr/>
+                    <a:lstStyle/>
+                    <a:p>
+                      <a:pPr indent="0" marL="0">
+                        <a:buNone/>
+                      </a:pPr>
+                      <a:r>
+                        <a:rPr lang="en-US" sz="1200" dirty="0">
+                          <a:solidFill>
+                            <a:srgbClr val="1B2426"/>
+                          </a:solidFill>
+                          <a:latin typeface="맑은 고딕" pitchFamily="34" charset="0"/>
+                          <a:ea typeface="맑은 고딕" pitchFamily="34" charset="-122"/>
+                          <a:cs typeface="맑은 고딕" pitchFamily="34" charset="-120"/>
+                        </a:rPr>
+                        <a:t>2월 · 4월 · 9월</a:t>
+                      </a:r>
+                      <a:endParaRPr lang="en-US" sz="1200" dirty="0">
+                        <a:latin typeface="맑은 고딕" charset="0"/>
+                        <a:ea typeface="맑은 고딕" charset="0"/>
+                        <a:cs typeface="맑은 고딕" charset="0"/>
+                      </a:endParaRPr>
+                    </a:p>
+                  </a:txBody>
+                  <a:tcPr marL="88900" marR="88900" marT="50800" marB="50800" anchor="ctr">
+                    <a:lnL w="6350" cap="flat" cmpd="sng" algn="ctr">
+                      <a:solidFill>
+                        <a:srgbClr val="DCD6C9"/>
+                      </a:solidFill>
+                      <a:prstDash val="solid"/>
+                      <a:round/>
+                      <a:headEnd type="none" w="med" len="med"/>
+                      <a:tailEnd type="none" w="med" len="med"/>
+                    </a:lnL>
+                    <a:lnR w="6350" cap="flat" cmpd="sng" algn="ctr">
+                      <a:solidFill>
+                        <a:srgbClr val="DCD6C9"/>
+                      </a:solidFill>
+                      <a:prstDash val="solid"/>
+                      <a:round/>
+                      <a:headEnd type="none" w="med" len="med"/>
+                      <a:tailEnd type="none" w="med" len="med"/>
+                    </a:lnR>
+                    <a:lnT w="6350" cap="flat" cmpd="sng" algn="ctr">
+                      <a:solidFill>
+                        <a:srgbClr val="DCD6C9"/>
+                      </a:solidFill>
+                      <a:prstDash val="solid"/>
+                      <a:round/>
+                      <a:headEnd type="none" w="med" len="med"/>
+                      <a:tailEnd type="none" w="med" len="med"/>
+                    </a:lnT>
+                    <a:lnB w="6350" cap="flat" cmpd="sng" algn="ctr">
+                      <a:solidFill>
+                        <a:srgbClr val="DCD6C9"/>
+                      </a:solidFill>
+                      <a:prstDash val="solid"/>
+                      <a:round/>
+                      <a:headEnd type="none" w="med" len="med"/>
+                      <a:tailEnd type="none" w="med" len="med"/>
+                    </a:lnB>
+                    <a:solidFill>
+                      <a:srgbClr val="FFFFFF"/>
+                    </a:solidFill>
+                  </a:tcPr>
+                </a:tc>
+                <a:tc>
+                  <a:txBody>
+                    <a:bodyPr/>
+                    <a:lstStyle/>
+                    <a:p>
+                      <a:pPr indent="0" marL="0">
+                        <a:buNone/>
+                      </a:pPr>
+                      <a:r>
+                        <a:rPr lang="en-US" sz="1200" dirty="0">
+                          <a:solidFill>
+                            <a:srgbClr val="1B2426"/>
+                          </a:solidFill>
+                          <a:latin typeface="맑은 고딕" pitchFamily="34" charset="0"/>
+                          <a:ea typeface="맑은 고딕" pitchFamily="34" charset="-122"/>
+                          <a:cs typeface="맑은 고딕" pitchFamily="34" charset="-120"/>
+                        </a:rPr>
+                        <a:t>1월 · 4월 · 9월</a:t>
+                      </a:r>
+                      <a:endParaRPr lang="en-US" sz="1200" dirty="0">
+                        <a:latin typeface="맑은 고딕" charset="0"/>
+                        <a:ea typeface="맑은 고딕" charset="0"/>
+                        <a:cs typeface="맑은 고딕" charset="0"/>
+                      </a:endParaRPr>
+                    </a:p>
+                  </a:txBody>
+                  <a:tcPr marL="88900" marR="88900" marT="50800" marB="50800" anchor="ctr">
+                    <a:lnL w="6350" cap="flat" cmpd="sng" algn="ctr">
+                      <a:solidFill>
+                        <a:srgbClr val="DCD6C9"/>
+                      </a:solidFill>
+                      <a:prstDash val="solid"/>
+                      <a:round/>
+                      <a:headEnd type="none" w="med" len="med"/>
+                      <a:tailEnd type="none" w="med" len="med"/>
+                    </a:lnL>
+                    <a:lnR w="6350" cap="flat" cmpd="sng" algn="ctr">
+                      <a:solidFill>
+                        <a:srgbClr val="DCD6C9"/>
+                      </a:solidFill>
+                      <a:prstDash val="solid"/>
+                      <a:round/>
+                      <a:headEnd type="none" w="med" len="med"/>
+                      <a:tailEnd type="none" w="med" len="med"/>
+                    </a:lnR>
+                    <a:lnT w="6350" cap="flat" cmpd="sng" algn="ctr">
+                      <a:solidFill>
+                        <a:srgbClr val="DCD6C9"/>
+                      </a:solidFill>
+                      <a:prstDash val="solid"/>
+                      <a:round/>
+                      <a:headEnd type="none" w="med" len="med"/>
+                      <a:tailEnd type="none" w="med" len="med"/>
+                    </a:lnT>
+                    <a:lnB w="6350" cap="flat" cmpd="sng" algn="ctr">
+                      <a:solidFill>
+                        <a:srgbClr val="DCD6C9"/>
+                      </a:solidFill>
+                      <a:prstDash val="solid"/>
+                      <a:round/>
+                      <a:headEnd type="none" w="med" len="med"/>
+                      <a:tailEnd type="none" w="med" len="med"/>
+                    </a:lnB>
+                    <a:solidFill>
+                      <a:srgbClr val="FFFFFF"/>
+                    </a:solidFill>
+                  </a:tcPr>
+                </a:tc>
+              </a:tr>
+              <a:tr h="429768">
+                <a:tc>
+                  <a:txBody>
+                    <a:bodyPr/>
+                    <a:lstStyle/>
+                    <a:p>
+                      <a:pPr indent="0" marL="0">
+                        <a:buNone/>
+                      </a:pPr>
+                      <a:r>
+                        <a:rPr lang="en-US" sz="1200" dirty="0">
+                          <a:solidFill>
+                            <a:srgbClr val="1B2426"/>
+                          </a:solidFill>
+                          <a:latin typeface="맑은 고딕" pitchFamily="34" charset="0"/>
+                          <a:ea typeface="맑은 고딕" pitchFamily="34" charset="-122"/>
+                          <a:cs typeface="맑은 고딕" pitchFamily="34" charset="-120"/>
+                        </a:rPr>
+                        <a:t>파운데이션 학비</a:t>
+                      </a:r>
+                      <a:endParaRPr lang="en-US" sz="1200" dirty="0">
+                        <a:latin typeface="맑은 고딕" charset="0"/>
+                        <a:ea typeface="맑은 고딕" charset="0"/>
+                        <a:cs typeface="맑은 고딕" charset="0"/>
+                      </a:endParaRPr>
+                    </a:p>
+                  </a:txBody>
+                  <a:tcPr marL="88900" marR="88900" marT="50800" marB="50800" anchor="ctr">
+                    <a:lnL w="6350" cap="flat" cmpd="sng" algn="ctr">
+                      <a:solidFill>
+                        <a:srgbClr val="DCD6C9"/>
+                      </a:solidFill>
+                      <a:prstDash val="solid"/>
+                      <a:round/>
+                      <a:headEnd type="none" w="med" len="med"/>
+                      <a:tailEnd type="none" w="med" len="med"/>
+                    </a:lnL>
+                    <a:lnR w="6350" cap="flat" cmpd="sng" algn="ctr">
+                      <a:solidFill>
+                        <a:srgbClr val="DCD6C9"/>
+                      </a:solidFill>
+                      <a:prstDash val="solid"/>
+                      <a:round/>
+                      <a:headEnd type="none" w="med" len="med"/>
+                      <a:tailEnd type="none" w="med" len="med"/>
+                    </a:lnR>
+                    <a:lnT w="6350" cap="flat" cmpd="sng" algn="ctr">
+                      <a:solidFill>
+                        <a:srgbClr val="DCD6C9"/>
+                      </a:solidFill>
+                      <a:prstDash val="solid"/>
+                      <a:round/>
+                      <a:headEnd type="none" w="med" len="med"/>
+                      <a:tailEnd type="none" w="med" len="med"/>
+                    </a:lnT>
+                    <a:lnB w="6350" cap="flat" cmpd="sng" algn="ctr">
+                      <a:solidFill>
+                        <a:srgbClr val="DCD6C9"/>
+                      </a:solidFill>
+                      <a:prstDash val="solid"/>
+                      <a:round/>
+                      <a:headEnd type="none" w="med" len="med"/>
+                      <a:tailEnd type="none" w="med" len="med"/>
+                    </a:lnB>
+                    <a:solidFill>
+                      <a:srgbClr val="F1EDE4"/>
+                    </a:solidFill>
+                  </a:tcPr>
+                </a:tc>
+                <a:tc>
+                  <a:txBody>
+                    <a:bodyPr/>
+                    <a:lstStyle/>
+                    <a:p>
+                      <a:pPr indent="0" marL="0">
+                        <a:buNone/>
+                      </a:pPr>
+                      <a:r>
+                        <a:rPr lang="en-US" sz="1200" dirty="0">
+                          <a:solidFill>
+                            <a:srgbClr val="1B2426"/>
+                          </a:solidFill>
+                          <a:latin typeface="맑은 고딕" pitchFamily="34" charset="0"/>
+                          <a:ea typeface="맑은 고딕" pitchFamily="34" charset="-122"/>
+                          <a:cs typeface="맑은 고딕" pitchFamily="34" charset="-120"/>
+                        </a:rPr>
+                        <a:t>RM 44,044 · 약 1,490만 원</a:t>
+                      </a:r>
+                      <a:endParaRPr lang="en-US" sz="1200" dirty="0">
+                        <a:latin typeface="맑은 고딕" charset="0"/>
+                        <a:ea typeface="맑은 고딕" charset="0"/>
+                        <a:cs typeface="맑은 고딕" charset="0"/>
+                      </a:endParaRPr>
+                    </a:p>
+                  </a:txBody>
+                  <a:tcPr marL="88900" marR="88900" marT="50800" marB="50800" anchor="ctr">
+                    <a:lnL w="6350" cap="flat" cmpd="sng" algn="ctr">
+                      <a:solidFill>
+                        <a:srgbClr val="DCD6C9"/>
+                      </a:solidFill>
+                      <a:prstDash val="solid"/>
+                      <a:round/>
+                      <a:headEnd type="none" w="med" len="med"/>
+                      <a:tailEnd type="none" w="med" len="med"/>
+                    </a:lnL>
+                    <a:lnR w="6350" cap="flat" cmpd="sng" algn="ctr">
+                      <a:solidFill>
+                        <a:srgbClr val="DCD6C9"/>
+                      </a:solidFill>
+                      <a:prstDash val="solid"/>
+                      <a:round/>
+                      <a:headEnd type="none" w="med" len="med"/>
+                      <a:tailEnd type="none" w="med" len="med"/>
+                    </a:lnR>
+                    <a:lnT w="6350" cap="flat" cmpd="sng" algn="ctr">
+                      <a:solidFill>
+                        <a:srgbClr val="DCD6C9"/>
+                      </a:solidFill>
+                      <a:prstDash val="solid"/>
+                      <a:round/>
+                      <a:headEnd type="none" w="med" len="med"/>
+                      <a:tailEnd type="none" w="med" len="med"/>
+                    </a:lnT>
+                    <a:lnB w="6350" cap="flat" cmpd="sng" algn="ctr">
+                      <a:solidFill>
+                        <a:srgbClr val="DCD6C9"/>
+                      </a:solidFill>
+                      <a:prstDash val="solid"/>
+                      <a:round/>
+                      <a:headEnd type="none" w="med" len="med"/>
+                      <a:tailEnd type="none" w="med" len="med"/>
+                    </a:lnB>
+                    <a:solidFill>
+                      <a:srgbClr val="F1EDE4"/>
+                    </a:solidFill>
+                  </a:tcPr>
+                </a:tc>
+                <a:tc>
+                  <a:txBody>
+                    <a:bodyPr/>
+                    <a:lstStyle/>
+                    <a:p>
+                      <a:pPr indent="0" marL="0">
+                        <a:buNone/>
+                      </a:pPr>
+                      <a:r>
+                        <a:rPr lang="en-US" sz="1200" dirty="0">
+                          <a:solidFill>
+                            <a:srgbClr val="1B2426"/>
+                          </a:solidFill>
+                          <a:latin typeface="맑은 고딕" pitchFamily="34" charset="0"/>
+                          <a:ea typeface="맑은 고딕" pitchFamily="34" charset="-122"/>
+                          <a:cs typeface="맑은 고딕" pitchFamily="34" charset="-120"/>
+                        </a:rPr>
+                        <a:t>RM 17,850~29,350 · 약 610만~990만 원</a:t>
+                      </a:r>
+                      <a:endParaRPr lang="en-US" sz="1200" dirty="0">
+                        <a:latin typeface="맑은 고딕" charset="0"/>
+                        <a:ea typeface="맑은 고딕" charset="0"/>
+                        <a:cs typeface="맑은 고딕" charset="0"/>
+                      </a:endParaRPr>
+                    </a:p>
+                  </a:txBody>
+                  <a:tcPr marL="88900" marR="88900" marT="50800" marB="50800" anchor="ctr">
+                    <a:lnL w="6350" cap="flat" cmpd="sng" algn="ctr">
+                      <a:solidFill>
+                        <a:srgbClr val="DCD6C9"/>
+                      </a:solidFill>
+                      <a:prstDash val="solid"/>
+                      <a:round/>
+                      <a:headEnd type="none" w="med" len="med"/>
+                      <a:tailEnd type="none" w="med" len="med"/>
+                    </a:lnL>
+                    <a:lnR w="6350" cap="flat" cmpd="sng" algn="ctr">
+                      <a:solidFill>
+                        <a:srgbClr val="DCD6C9"/>
+                      </a:solidFill>
+                      <a:prstDash val="solid"/>
+                      <a:round/>
+                      <a:headEnd type="none" w="med" len="med"/>
+                      <a:tailEnd type="none" w="med" len="med"/>
+                    </a:lnR>
+                    <a:lnT w="6350" cap="flat" cmpd="sng" algn="ctr">
+                      <a:solidFill>
+                        <a:srgbClr val="DCD6C9"/>
+                      </a:solidFill>
+                      <a:prstDash val="solid"/>
+                      <a:round/>
+                      <a:headEnd type="none" w="med" len="med"/>
+                      <a:tailEnd type="none" w="med" len="med"/>
+                    </a:lnT>
+                    <a:lnB w="6350" cap="flat" cmpd="sng" algn="ctr">
+                      <a:solidFill>
+                        <a:srgbClr val="DCD6C9"/>
+                      </a:solidFill>
+                      <a:prstDash val="solid"/>
+                      <a:round/>
+                      <a:headEnd type="none" w="med" len="med"/>
+                      <a:tailEnd type="none" w="med" len="med"/>
+                    </a:lnB>
+                    <a:solidFill>
+                      <a:srgbClr val="F1EDE4"/>
+                    </a:solidFill>
+                  </a:tcPr>
+                </a:tc>
+              </a:tr>
+              <a:tr h="429768">
+                <a:tc>
+                  <a:txBody>
+                    <a:bodyPr/>
+                    <a:lstStyle/>
+                    <a:p>
+                      <a:pPr indent="0" marL="0">
+                        <a:buNone/>
+                      </a:pPr>
+                      <a:r>
+                        <a:rPr lang="en-US" sz="1200" dirty="0">
+                          <a:solidFill>
+                            <a:srgbClr val="1B2426"/>
+                          </a:solidFill>
+                          <a:latin typeface="맑은 고딕" pitchFamily="34" charset="0"/>
+                          <a:ea typeface="맑은 고딕" pitchFamily="34" charset="-122"/>
+                          <a:cs typeface="맑은 고딕" pitchFamily="34" charset="-120"/>
+                        </a:rPr>
+                        <a:t>파운데이션 + 공학 5년</a:t>
+                      </a:r>
+                      <a:endParaRPr lang="en-US" sz="1200" dirty="0">
+                        <a:latin typeface="맑은 고딕" charset="0"/>
+                        <a:ea typeface="맑은 고딕" charset="0"/>
+                        <a:cs typeface="맑은 고딕" charset="0"/>
+                      </a:endParaRPr>
+                    </a:p>
+                  </a:txBody>
+                  <a:tcPr marL="88900" marR="88900" marT="50800" marB="50800" anchor="ctr">
+                    <a:lnL w="6350" cap="flat" cmpd="sng" algn="ctr">
+                      <a:solidFill>
+                        <a:srgbClr val="DCD6C9"/>
+                      </a:solidFill>
+                      <a:prstDash val="solid"/>
+                      <a:round/>
+                      <a:headEnd type="none" w="med" len="med"/>
+                      <a:tailEnd type="none" w="med" len="med"/>
+                    </a:lnL>
+                    <a:lnR w="6350" cap="flat" cmpd="sng" algn="ctr">
+                      <a:solidFill>
+                        <a:srgbClr val="DCD6C9"/>
+                      </a:solidFill>
+                      <a:prstDash val="solid"/>
+                      <a:round/>
+                      <a:headEnd type="none" w="med" len="med"/>
+                      <a:tailEnd type="none" w="med" len="med"/>
+                    </a:lnR>
+                    <a:lnT w="6350" cap="flat" cmpd="sng" algn="ctr">
+                      <a:solidFill>
+                        <a:srgbClr val="DCD6C9"/>
+                      </a:solidFill>
+                      <a:prstDash val="solid"/>
+                      <a:round/>
+                      <a:headEnd type="none" w="med" len="med"/>
+                      <a:tailEnd type="none" w="med" len="med"/>
+                    </a:lnT>
+                    <a:lnB w="6350" cap="flat" cmpd="sng" algn="ctr">
+                      <a:solidFill>
+                        <a:srgbClr val="DCD6C9"/>
+                      </a:solidFill>
+                      <a:prstDash val="solid"/>
+                      <a:round/>
+                      <a:headEnd type="none" w="med" len="med"/>
+                      <a:tailEnd type="none" w="med" len="med"/>
+                    </a:lnB>
+                    <a:solidFill>
+                      <a:srgbClr val="FFFFFF"/>
+                    </a:solidFill>
+                  </a:tcPr>
+                </a:tc>
+                <a:tc>
+                  <a:txBody>
+                    <a:bodyPr/>
+                    <a:lstStyle/>
+                    <a:p>
+                      <a:pPr indent="0" marL="0">
+                        <a:buNone/>
+                      </a:pPr>
+                      <a:r>
+                        <a:rPr lang="en-US" sz="1200" dirty="0">
+                          <a:solidFill>
+                            <a:srgbClr val="1B2426"/>
+                          </a:solidFill>
+                          <a:latin typeface="맑은 고딕" pitchFamily="34" charset="0"/>
+                          <a:ea typeface="맑은 고딕" pitchFamily="34" charset="-122"/>
+                          <a:cs typeface="맑은 고딕" pitchFamily="34" charset="-120"/>
+                        </a:rPr>
+                        <a:t>약 8,300만 원</a:t>
+                      </a:r>
+                      <a:endParaRPr lang="en-US" sz="1200" dirty="0">
+                        <a:latin typeface="맑은 고딕" charset="0"/>
+                        <a:ea typeface="맑은 고딕" charset="0"/>
+                        <a:cs typeface="맑은 고딕" charset="0"/>
+                      </a:endParaRPr>
+                    </a:p>
+                  </a:txBody>
+                  <a:tcPr marL="88900" marR="88900" marT="50800" marB="50800" anchor="ctr">
+                    <a:lnL w="6350" cap="flat" cmpd="sng" algn="ctr">
+                      <a:solidFill>
+                        <a:srgbClr val="DCD6C9"/>
+                      </a:solidFill>
+                      <a:prstDash val="solid"/>
+                      <a:round/>
+                      <a:headEnd type="none" w="med" len="med"/>
+                      <a:tailEnd type="none" w="med" len="med"/>
+                    </a:lnL>
+                    <a:lnR w="6350" cap="flat" cmpd="sng" algn="ctr">
+                      <a:solidFill>
+                        <a:srgbClr val="DCD6C9"/>
+                      </a:solidFill>
+                      <a:prstDash val="solid"/>
+                      <a:round/>
+                      <a:headEnd type="none" w="med" len="med"/>
+                      <a:tailEnd type="none" w="med" len="med"/>
+                    </a:lnR>
+                    <a:lnT w="6350" cap="flat" cmpd="sng" algn="ctr">
+                      <a:solidFill>
+                        <a:srgbClr val="DCD6C9"/>
+                      </a:solidFill>
+                      <a:prstDash val="solid"/>
+                      <a:round/>
+                      <a:headEnd type="none" w="med" len="med"/>
+                      <a:tailEnd type="none" w="med" len="med"/>
+                    </a:lnT>
+                    <a:lnB w="6350" cap="flat" cmpd="sng" algn="ctr">
+                      <a:solidFill>
+                        <a:srgbClr val="DCD6C9"/>
+                      </a:solidFill>
+                      <a:prstDash val="solid"/>
+                      <a:round/>
+                      <a:headEnd type="none" w="med" len="med"/>
+                      <a:tailEnd type="none" w="med" len="med"/>
+                    </a:lnB>
+                    <a:solidFill>
+                      <a:srgbClr val="FFFFFF"/>
+                    </a:solidFill>
+                  </a:tcPr>
+                </a:tc>
+                <a:tc>
+                  <a:txBody>
+                    <a:bodyPr/>
+                    <a:lstStyle/>
+                    <a:p>
+                      <a:pPr indent="0" marL="0">
+                        <a:buNone/>
+                      </a:pPr>
+                      <a:r>
+                        <a:rPr lang="en-US" sz="1200" dirty="0">
+                          <a:solidFill>
+                            <a:srgbClr val="1B2426"/>
+                          </a:solidFill>
+                          <a:latin typeface="맑은 고딕" pitchFamily="34" charset="0"/>
+                          <a:ea typeface="맑은 고딕" pitchFamily="34" charset="-122"/>
+                          <a:cs typeface="맑은 고딕" pitchFamily="34" charset="-120"/>
+                        </a:rPr>
+                        <a:t>약 5,810만~6,200만 원</a:t>
+                      </a:r>
+                      <a:endParaRPr lang="en-US" sz="1200" dirty="0">
+                        <a:latin typeface="맑은 고딕" charset="0"/>
+                        <a:ea typeface="맑은 고딕" charset="0"/>
+                        <a:cs typeface="맑은 고딕" charset="0"/>
+                      </a:endParaRPr>
+                    </a:p>
+                  </a:txBody>
+                  <a:tcPr marL="88900" marR="88900" marT="50800" marB="50800" anchor="ctr">
+                    <a:lnL w="6350" cap="flat" cmpd="sng" algn="ctr">
+                      <a:solidFill>
+                        <a:srgbClr val="DCD6C9"/>
+                      </a:solidFill>
+                      <a:prstDash val="solid"/>
+                      <a:round/>
+                      <a:headEnd type="none" w="med" len="med"/>
+                      <a:tailEnd type="none" w="med" len="med"/>
+                    </a:lnL>
+                    <a:lnR w="6350" cap="flat" cmpd="sng" algn="ctr">
+                      <a:solidFill>
+                        <a:srgbClr val="DCD6C9"/>
+                      </a:solidFill>
+                      <a:prstDash val="solid"/>
+                      <a:round/>
+                      <a:headEnd type="none" w="med" len="med"/>
+                      <a:tailEnd type="none" w="med" len="med"/>
+                    </a:lnR>
+                    <a:lnT w="6350" cap="flat" cmpd="sng" algn="ctr">
+                      <a:solidFill>
+                        <a:srgbClr val="DCD6C9"/>
+                      </a:solidFill>
+                      <a:prstDash val="solid"/>
+                      <a:round/>
+                      <a:headEnd type="none" w="med" len="med"/>
+                      <a:tailEnd type="none" w="med" len="med"/>
+                    </a:lnT>
+                    <a:lnB w="6350" cap="flat" cmpd="sng" algn="ctr">
+                      <a:solidFill>
+                        <a:srgbClr val="DCD6C9"/>
+                      </a:solidFill>
+                      <a:prstDash val="solid"/>
+                      <a:round/>
+                      <a:headEnd type="none" w="med" len="med"/>
+                      <a:tailEnd type="none" w="med" len="med"/>
+                    </a:lnB>
+                    <a:solidFill>
+                      <a:srgbClr val="FFFFFF"/>
+                    </a:solidFill>
+                  </a:tcPr>
+                </a:tc>
+              </a:tr>
+            </a:tbl>
+          </a:graphicData>
+        </a:graphic>
+      </p:graphicFrame>
+      <p:sp>
+        <p:nvSpPr>
+          <p:cNvPr id="8" name="Text 5"/>
+          <p:cNvSpPr txBox="1"/>
+          <p:nvPr/>
+        </p:nvSpPr>
+        <p:spPr>
+          <a:xfrm>
+            <a:off x="640080" y="6400800"/>
+            <a:ext cx="10911535" cy="310896"/>
+          </a:xfrm>
+          <a:prstGeom prst="rect">
+            <a:avLst/>
+          </a:prstGeom>
+          <a:noFill/>
+          <a:ln/>
+        </p:spPr>
+        <p:txBody>
+          <a:bodyPr wrap="square" lIns="0" tIns="0" rIns="0" bIns="0" rtlCol="0" anchor="t"/>
+          <a:lstStyle/>
+          <a:p>
+            <a:pPr algn="l" indent="0" marL="0">
+              <a:lnSpc>
+                <a:spcPct val="125000"/>
+              </a:lnSpc>
+              <a:buNone/>
+            </a:pPr>
+            <a:r>
+              <a:rPr lang="en-US" sz="900" dirty="0">
+                <a:solidFill>
+                  <a:srgbClr val="6E7C7A"/>
+                </a:solidFill>
+                <a:latin typeface="맑은 고딕" pitchFamily="34" charset="0"/>
+                <a:ea typeface="맑은 고딕" pitchFamily="34" charset="-122"/>
+                <a:cs typeface="맑은 고딕" pitchFamily="34" charset="-120"/>
+              </a:rPr>
+              <a:t>학비만 놓고 보면 선웨이가 낮습니다. 다만 강세 전공이 다릅니다 — 호텔·디자인이면 테일러스, 회계·금융·CS면 선웨이입니다.</a:t>
+            </a:r>
+            <a:endParaRPr lang="en-US" sz="900" dirty="0"/>
+          </a:p>
+        </p:txBody>
+      </p:sp>
+    </p:spTree>
+  </p:cSld>
+  <p:clrMapOvr>
+    <a:masterClrMapping/>
+  </p:clrMapOvr>
+</p:sld>
+</file>
+
+<file path=ppt/slides/slide11.xml><?xml version="1.0" encoding="utf-8"?>
+<p:sld xmlns:a="http://schemas.openxmlformats.org/drawingml/2006/main" xmlns:r="http://schemas.openxmlformats.org/officeDocument/2006/relationships" xmlns:p="http://schemas.openxmlformats.org/presentationml/2006/main">
+  <p:cSld name="Slide 11">
+    <p:bg>
+      <p:bgPr>
+        <a:solidFill>
+          <a:srgbClr val="FFFFFF"/>
+        </a:solidFill>
+      </p:bgPr>
+    </p:bg>
+    <p:spTree>
+      <p:nvGrpSpPr>
+        <p:cNvPr id="1" name=""/>
+        <p:cNvGrpSpPr/>
+        <p:nvPr/>
+      </p:nvGrpSpPr>
+      <p:grpSpPr>
+        <a:xfrm>
+          <a:off x="0" y="0"/>
+          <a:ext cx="0" cy="0"/>
+          <a:chOff x="0" y="0"/>
+          <a:chExt cx="0" cy="0"/>
+        </a:xfrm>
+      </p:grpSpPr>
+      <p:sp>
+        <p:nvSpPr>
+          <p:cNvPr id="2" name="Shape 0"/>
+          <p:cNvSpPr/>
+          <p:nvPr/>
+        </p:nvSpPr>
+        <p:spPr>
+          <a:xfrm>
+            <a:off x="640080" y="475488"/>
+            <a:ext cx="566928" cy="566928"/>
+          </a:xfrm>
+          <a:prstGeom prst="roundRect">
+            <a:avLst>
+              <a:gd name="adj" fmla="val 9677"/>
+            </a:avLst>
+          </a:prstGeom>
+          <a:solidFill>
+            <a:srgbClr val="134744"/>
+          </a:solidFill>
+          <a:ln/>
+        </p:spPr>
+      </p:sp>
+      <p:sp>
+        <p:nvSpPr>
+          <p:cNvPr id="3" name="Text 1"/>
+          <p:cNvSpPr txBox="1"/>
+          <p:nvPr/>
+        </p:nvSpPr>
+        <p:spPr>
+          <a:xfrm>
+            <a:off x="640080" y="475488"/>
+            <a:ext cx="566928" cy="566928"/>
+          </a:xfrm>
+          <a:prstGeom prst="rect">
+            <a:avLst/>
+          </a:prstGeom>
+          <a:noFill/>
+          <a:ln/>
+        </p:spPr>
+        <p:txBody>
+          <a:bodyPr wrap="square" lIns="0" tIns="0" rIns="0" bIns="0" rtlCol="0" anchor="ctr"/>
+          <a:lstStyle/>
+          <a:p>
+            <a:pPr algn="ctr" indent="0" marL="0">
+              <a:lnSpc>
+                <a:spcPct val="122000"/>
+              </a:lnSpc>
+              <a:buNone/>
+            </a:pPr>
+            <a:r>
+              <a:rPr lang="en-US" sz="1700" b="1" dirty="0">
+                <a:solidFill>
+                  <a:srgbClr val="C08A2E"/>
+                </a:solidFill>
+                <a:latin typeface="맑은 고딕" pitchFamily="34" charset="0"/>
+                <a:ea typeface="맑은 고딕" pitchFamily="34" charset="-122"/>
+                <a:cs typeface="맑은 고딕" pitchFamily="34" charset="-120"/>
+              </a:rPr>
+              <a:t>10</a:t>
+            </a:r>
+            <a:endParaRPr lang="en-US" sz="1700" dirty="0"/>
+          </a:p>
+        </p:txBody>
+      </p:sp>
+      <p:sp>
+        <p:nvSpPr>
+          <p:cNvPr id="4" name="Text 2"/>
+          <p:cNvSpPr txBox="1"/>
+          <p:nvPr/>
+        </p:nvSpPr>
+        <p:spPr>
+          <a:xfrm>
+            <a:off x="1389888" y="457200"/>
+            <a:ext cx="10161727" cy="237744"/>
+          </a:xfrm>
+          <a:prstGeom prst="rect">
+            <a:avLst/>
+          </a:prstGeom>
+          <a:noFill/>
+          <a:ln/>
+        </p:spPr>
+        <p:txBody>
+          <a:bodyPr wrap="square" lIns="0" tIns="0" rIns="0" bIns="0" rtlCol="0" anchor="t"/>
+          <a:lstStyle/>
+          <a:p>
+            <a:pPr algn="l" indent="0" marL="0">
+              <a:lnSpc>
+                <a:spcPct val="122000"/>
+              </a:lnSpc>
+              <a:buNone/>
+            </a:pPr>
+            <a:r>
+              <a:rPr lang="en-US" sz="1100" b="1" spc="200" kern="0" dirty="0">
+                <a:solidFill>
+                  <a:srgbClr val="1F6B66"/>
+                </a:solidFill>
+                <a:latin typeface="맑은 고딕" pitchFamily="34" charset="0"/>
+                <a:ea typeface="맑은 고딕" pitchFamily="34" charset="-122"/>
+                <a:cs typeface="맑은 고딕" pitchFamily="34" charset="-120"/>
+              </a:rPr>
               <a:t>TOTAL BUDGET</a:t>
             </a:r>
             <a:endParaRPr lang="en-US" sz="1100" dirty="0"/>
@@ -2538,7 +4982,7 @@
       </p:sp>
       <p:graphicFrame>
         <p:nvGraphicFramePr>
-          <p:cNvPr id="11" name="Table 0"/>
+          <p:cNvPr id="12" name="Table 0"/>
           <p:cNvGraphicFramePr>
             <a:graphicFrameLocks noGrp="1"/>
           </p:cNvGraphicFramePr>
@@ -6271,9 +8715,9 @@
 </p:sld>
 </file>
 
-<file path=ppt/slides/slide11.xml><?xml version="1.0" encoding="utf-8"?>
+<file path=ppt/slides/slide12.xml><?xml version="1.0" encoding="utf-8"?>
 <p:sld xmlns:a="http://schemas.openxmlformats.org/drawingml/2006/main" xmlns:r="http://schemas.openxmlformats.org/officeDocument/2006/relationships" xmlns:p="http://schemas.openxmlformats.org/presentationml/2006/main">
-  <p:cSld name="Slide 11">
+  <p:cSld name="Slide 12">
     <p:bg>
       <p:bgPr>
         <a:solidFill>
@@ -6353,7 +8797,7 @@
                 <a:ea typeface="맑은 고딕" pitchFamily="34" charset="-122"/>
                 <a:cs typeface="맑은 고딕" pitchFamily="34" charset="-120"/>
               </a:rPr>
-              <a:t>10</a:t>
+              <a:t>11</a:t>
             </a:r>
             <a:endParaRPr lang="en-US" sz="1700" dirty="0"/>
           </a:p>
@@ -8337,9 +10781,9 @@
 </p:sld>
 </file>
 
-<file path=ppt/slides/slide12.xml><?xml version="1.0" encoding="utf-8"?>
+<file path=ppt/slides/slide13.xml><?xml version="1.0" encoding="utf-8"?>
 <p:sld xmlns:a="http://schemas.openxmlformats.org/drawingml/2006/main" xmlns:r="http://schemas.openxmlformats.org/officeDocument/2006/relationships" xmlns:p="http://schemas.openxmlformats.org/presentationml/2006/main">
-  <p:cSld name="Slide 12">
+  <p:cSld name="Slide 13">
     <p:bg>
       <p:bgPr>
         <a:solidFill>
@@ -8419,7 +10863,7 @@
                 <a:ea typeface="맑은 고딕" pitchFamily="34" charset="-122"/>
                 <a:cs typeface="맑은 고딕" pitchFamily="34" charset="-120"/>
               </a:rPr>
-              <a:t>11</a:t>
+              <a:t>12</a:t>
             </a:r>
             <a:endParaRPr lang="en-US" sz="1700" dirty="0"/>
           </a:p>
@@ -8553,7 +10997,7 @@
       </p:sp>
       <p:graphicFrame>
         <p:nvGraphicFramePr>
-          <p:cNvPr id="13" name="Table 0"/>
+          <p:cNvPr id="14" name="Table 0"/>
           <p:cNvGraphicFramePr>
             <a:graphicFrameLocks noGrp="1"/>
           </p:cNvGraphicFramePr>
@@ -23598,7 +26042,7 @@
                 <a:ea typeface="맑은 고딕" pitchFamily="34" charset="-122"/>
                 <a:cs typeface="맑은 고딕" pitchFamily="34" charset="-120"/>
               </a:rPr>
-              <a:t>SIDE BY SIDE</a:t>
+              <a:t>ENGINEERING DEGREES</a:t>
             </a:r>
             <a:endParaRPr lang="en-US" sz="1100" dirty="0"/>
           </a:p>
@@ -23640,7 +26084,7 @@
                 <a:ea typeface="맑은 고딕" pitchFamily="34" charset="-122"/>
                 <a:cs typeface="맑은 고딕" pitchFamily="34" charset="-120"/>
               </a:rPr>
-              <a:t>테일러스 vs 선웨이</a:t>
+              <a:t>공학 학위, 무엇이 다른가</a:t>
             </a:r>
             <a:endParaRPr lang="en-US" sz="3000" dirty="0"/>
           </a:p>
@@ -23682,7 +26126,7 @@
                 <a:ea typeface="맑은 고딕" pitchFamily="34" charset="-122"/>
                 <a:cs typeface="맑은 고딕" pitchFamily="34" charset="-120"/>
               </a:rPr>
-              <a:t>어느 쪽이 좋은 학교인가가 아니라, 어느 쪽이 이 학생에게 맞는가</a:t>
+              <a:t>네 학교 모두 본과 4년제입니다 · 다른 것은 "어느 나라 학제를 따르는가"입니다</a:t>
             </a:r>
             <a:endParaRPr lang="en-US" sz="1300" dirty="0"/>
           </a:p>
@@ -23703,7 +26147,7 @@
           </p:nvPr>
         </p:nvGraphicFramePr>
         <p:xfrm>
-          <a:off x="640080" y="1810512"/>
+          <a:off x="640080" y="1828800"/>
           <a:ext cx="10911535" cy="914400"/>
         </p:xfrm>
         <a:graphic>
@@ -23711,11 +26155,12 @@
             <a:tbl>
               <a:tblPr/>
               <a:tblGrid>
-                <a:gridCol w="2377440"/>
-                <a:gridCol w="4267048"/>
-                <a:gridCol w="4267048"/>
+                <a:gridCol w="2286000"/>
+                <a:gridCol w="1005840"/>
+                <a:gridCol w="3017520"/>
+                <a:gridCol w="4602175"/>
               </a:tblGrid>
-              <a:tr h="429768">
+              <a:tr h="621792">
                 <a:tc>
                   <a:txBody>
                     <a:bodyPr/>
@@ -23725,7 +26170,7 @@
                         <a:buNone/>
                       </a:pPr>
                       <a:r>
-                        <a:rPr lang="en-US" sz="1200" b="1" dirty="0">
+                        <a:rPr lang="en-US" sz="1100" b="1" dirty="0">
                           <a:solidFill>
                             <a:srgbClr val="FFFFFF"/>
                           </a:solidFill>
@@ -23733,9 +26178,9 @@
                           <a:ea typeface="맑은 고딕" pitchFamily="34" charset="-122"/>
                           <a:cs typeface="맑은 고딕" pitchFamily="34" charset="-120"/>
                         </a:rPr>
-                        <a:t>기준</a:t>
+                        <a:t>대학</a:t>
                       </a:r>
-                      <a:endParaRPr lang="en-US" sz="1200" dirty="0">
+                      <a:endParaRPr lang="en-US" sz="1100" dirty="0">
                         <a:latin typeface="맑은 고딕" charset="0"/>
                         <a:ea typeface="맑은 고딕" charset="0"/>
                         <a:cs typeface="맑은 고딕" charset="0"/>
@@ -23793,7 +26238,7 @@
                         <a:buNone/>
                       </a:pPr>
                       <a:r>
-                        <a:rPr lang="en-US" sz="1200" b="1" dirty="0">
+                        <a:rPr lang="en-US" sz="1100" b="1" dirty="0">
                           <a:solidFill>
                             <a:srgbClr val="FFFFFF"/>
                           </a:solidFill>
@@ -23801,9 +26246,9 @@
                           <a:ea typeface="맑은 고딕" pitchFamily="34" charset="-122"/>
                           <a:cs typeface="맑은 고딕" pitchFamily="34" charset="-120"/>
                         </a:rPr>
-                        <a:t>테일러스</a:t>
+                        <a:t>본과 학제</a:t>
                       </a:r>
-                      <a:endParaRPr lang="en-US" sz="1200" dirty="0">
+                      <a:endParaRPr lang="en-US" sz="1100" dirty="0">
                         <a:latin typeface="맑은 고딕" charset="0"/>
                         <a:ea typeface="맑은 고딕" charset="0"/>
                         <a:cs typeface="맑은 고딕" charset="0"/>
@@ -23861,7 +26306,7 @@
                         <a:buNone/>
                       </a:pPr>
                       <a:r>
-                        <a:rPr lang="en-US" sz="1200" b="1" dirty="0">
+                        <a:rPr lang="en-US" sz="1100" b="1" dirty="0">
                           <a:solidFill>
                             <a:srgbClr val="FFFFFF"/>
                           </a:solidFill>
@@ -23869,9 +26314,9 @@
                           <a:ea typeface="맑은 고딕" pitchFamily="34" charset="-122"/>
                           <a:cs typeface="맑은 고딕" pitchFamily="34" charset="-120"/>
                         </a:rPr>
-                        <a:t>선웨이</a:t>
+                        <a:t>수여 학위</a:t>
                       </a:r>
-                      <a:endParaRPr lang="en-US" sz="1200" dirty="0">
+                      <a:endParaRPr lang="en-US" sz="1100" dirty="0">
                         <a:latin typeface="맑은 고딕" charset="0"/>
                         <a:ea typeface="맑은 고딕" charset="0"/>
                         <a:cs typeface="맑은 고딕" charset="0"/>
@@ -23920,8 +26365,6 @@
                     </a:solidFill>
                   </a:tcPr>
                 </a:tc>
-              </a:tr>
-              <a:tr h="429768">
                 <a:tc>
                   <a:txBody>
                     <a:bodyPr/>
@@ -23931,7 +26374,77 @@
                         <a:buNone/>
                       </a:pPr>
                       <a:r>
-                        <a:rPr lang="en-US" sz="1200" dirty="0">
+                        <a:rPr lang="en-US" sz="1100" b="1" dirty="0">
+                          <a:solidFill>
+                            <a:srgbClr val="FFFFFF"/>
+                          </a:solidFill>
+                          <a:latin typeface="맑은 고딕" pitchFamily="34" charset="0"/>
+                          <a:ea typeface="맑은 고딕" pitchFamily="34" charset="-122"/>
+                          <a:cs typeface="맑은 고딕" pitchFamily="34" charset="-120"/>
+                        </a:rPr>
+                        <a:t>특징</a:t>
+                      </a:r>
+                      <a:endParaRPr lang="en-US" sz="1100" dirty="0">
+                        <a:latin typeface="맑은 고딕" charset="0"/>
+                        <a:ea typeface="맑은 고딕" charset="0"/>
+                        <a:cs typeface="맑은 고딕" charset="0"/>
+                      </a:endParaRPr>
+                    </a:p>
+                  </a:txBody>
+                  <a:tcPr marL="88900" marR="88900" marT="50800" marB="50800" anchor="ctr">
+                    <a:lnL w="6350" cap="flat" cmpd="sng" algn="ctr">
+                      <a:solidFill>
+                        <a:srgbClr val="DCD6C9"/>
+                      </a:solidFill>
+                      <a:prstDash val="solid"/>
+                      <a:round/>
+                      <a:headEnd type="none" w="med" len="med"/>
+                      <a:tailEnd type="none" w="med" len="med"/>
+                    </a:lnL>
+                    <a:lnR w="6350" cap="flat" cmpd="sng" algn="ctr">
+                      <a:solidFill>
+                        <a:srgbClr val="DCD6C9"/>
+                      </a:solidFill>
+                      <a:prstDash val="solid"/>
+                      <a:round/>
+                      <a:headEnd type="none" w="med" len="med"/>
+                      <a:tailEnd type="none" w="med" len="med"/>
+                    </a:lnR>
+                    <a:lnT w="6350" cap="flat" cmpd="sng" algn="ctr">
+                      <a:solidFill>
+                        <a:srgbClr val="DCD6C9"/>
+                      </a:solidFill>
+                      <a:prstDash val="solid"/>
+                      <a:round/>
+                      <a:headEnd type="none" w="med" len="med"/>
+                      <a:tailEnd type="none" w="med" len="med"/>
+                    </a:lnT>
+                    <a:lnB w="6350" cap="flat" cmpd="sng" algn="ctr">
+                      <a:solidFill>
+                        <a:srgbClr val="DCD6C9"/>
+                      </a:solidFill>
+                      <a:prstDash val="solid"/>
+                      <a:round/>
+                      <a:headEnd type="none" w="med" len="med"/>
+                      <a:tailEnd type="none" w="med" len="med"/>
+                    </a:lnB>
+                    <a:solidFill>
+                      <a:srgbClr val="134744"/>
+                    </a:solidFill>
+                  </a:tcPr>
+                </a:tc>
+              </a:tr>
+              <a:tr h="621792">
+                <a:tc>
+                  <a:txBody>
+                    <a:bodyPr/>
+                    <a:lstStyle/>
+                    <a:p>
+                      <a:pPr indent="0" marL="0">
+                        <a:buNone/>
+                      </a:pPr>
+                      <a:r>
+                        <a:rPr lang="en-US" sz="1100" dirty="0">
                           <a:solidFill>
                             <a:srgbClr val="1B2426"/>
                           </a:solidFill>
@@ -23939,9 +26452,30 @@
                           <a:ea typeface="맑은 고딕" pitchFamily="34" charset="-122"/>
                           <a:cs typeface="맑은 고딕" pitchFamily="34" charset="-120"/>
                         </a:rPr>
-                        <a:t>설립</a:t>
+                        <a:t>테일러스</a:t>
                       </a:r>
-                      <a:endParaRPr lang="en-US" sz="1200" dirty="0">
+                      <a:endParaRPr lang="en-US" sz="1100" dirty="0">
+                        <a:latin typeface="맑은 고딕" charset="0"/>
+                        <a:ea typeface="맑은 고딕" charset="0"/>
+                        <a:cs typeface="맑은 고딕" charset="0"/>
+                      </a:endParaRPr>
+                    </a:p>
+                    <a:p>
+                      <a:pPr indent="0" marL="0">
+                        <a:buNone/>
+                      </a:pPr>
+                      <a:r>
+                        <a:rPr lang="en-US" sz="1100" dirty="0">
+                          <a:solidFill>
+                            <a:srgbClr val="1B2426"/>
+                          </a:solidFill>
+                          <a:latin typeface="맑은 고딕" pitchFamily="34" charset="0"/>
+                          <a:ea typeface="맑은 고딕" pitchFamily="34" charset="-122"/>
+                          <a:cs typeface="맑은 고딕" pitchFamily="34" charset="-120"/>
+                        </a:rPr>
+                        <a:t>(1편)</a:t>
+                      </a:r>
+                      <a:endParaRPr lang="en-US" sz="1100" dirty="0">
                         <a:latin typeface="맑은 고딕" charset="0"/>
                         <a:ea typeface="맑은 고딕" charset="0"/>
                         <a:cs typeface="맑은 고딕" charset="0"/>
@@ -23999,7 +26533,7 @@
                         <a:buNone/>
                       </a:pPr>
                       <a:r>
-                        <a:rPr lang="en-US" sz="1200" dirty="0">
+                        <a:rPr lang="en-US" sz="1100" dirty="0">
                           <a:solidFill>
                             <a:srgbClr val="1B2426"/>
                           </a:solidFill>
@@ -24007,9 +26541,9 @@
                           <a:ea typeface="맑은 고딕" pitchFamily="34" charset="-122"/>
                           <a:cs typeface="맑은 고딕" pitchFamily="34" charset="-120"/>
                         </a:rPr>
-                        <a:t>1969</a:t>
+                        <a:t>4년</a:t>
                       </a:r>
-                      <a:endParaRPr lang="en-US" sz="1200" dirty="0">
+                      <a:endParaRPr lang="en-US" sz="1100" dirty="0">
                         <a:latin typeface="맑은 고딕" charset="0"/>
                         <a:ea typeface="맑은 고딕" charset="0"/>
                         <a:cs typeface="맑은 고딕" charset="0"/>
@@ -24067,7 +26601,7 @@
                         <a:buNone/>
                       </a:pPr>
                       <a:r>
-                        <a:rPr lang="en-US" sz="1200" dirty="0">
+                        <a:rPr lang="en-US" sz="1100" dirty="0">
                           <a:solidFill>
                             <a:srgbClr val="1B2426"/>
                           </a:solidFill>
@@ -24075,9 +26609,30 @@
                           <a:ea typeface="맑은 고딕" pitchFamily="34" charset="-122"/>
                           <a:cs typeface="맑은 고딕" pitchFamily="34" charset="-120"/>
                         </a:rPr>
-                        <a:t>칼리지 1987 → 대학 2011</a:t>
+                        <a:t>Bachelor of ○○ Engineering</a:t>
                       </a:r>
-                      <a:endParaRPr lang="en-US" sz="1200" dirty="0">
+                      <a:endParaRPr lang="en-US" sz="1100" dirty="0">
+                        <a:latin typeface="맑은 고딕" charset="0"/>
+                        <a:ea typeface="맑은 고딕" charset="0"/>
+                        <a:cs typeface="맑은 고딕" charset="0"/>
+                      </a:endParaRPr>
+                    </a:p>
+                    <a:p>
+                      <a:pPr indent="0" marL="0">
+                        <a:buNone/>
+                      </a:pPr>
+                      <a:r>
+                        <a:rPr lang="en-US" sz="1100" dirty="0">
+                          <a:solidFill>
+                            <a:srgbClr val="1B2426"/>
+                          </a:solidFill>
+                          <a:latin typeface="맑은 고딕" pitchFamily="34" charset="0"/>
+                          <a:ea typeface="맑은 고딕" pitchFamily="34" charset="-122"/>
+                          <a:cs typeface="맑은 고딕" pitchFamily="34" charset="-120"/>
+                        </a:rPr>
+                        <a:t>with Honours</a:t>
+                      </a:r>
+                      <a:endParaRPr lang="en-US" sz="1100" dirty="0">
                         <a:latin typeface="맑은 고딕" charset="0"/>
                         <a:ea typeface="맑은 고딕" charset="0"/>
                         <a:cs typeface="맑은 고딕" charset="0"/>
@@ -24126,8 +26681,6 @@
                     </a:solidFill>
                   </a:tcPr>
                 </a:tc>
-              </a:tr>
-              <a:tr h="429768">
                 <a:tc>
                   <a:txBody>
                     <a:bodyPr/>
@@ -24137,7 +26690,7 @@
                         <a:buNone/>
                       </a:pPr>
                       <a:r>
-                        <a:rPr lang="en-US" sz="1200" dirty="0">
+                        <a:rPr lang="en-US" sz="1100" dirty="0">
                           <a:solidFill>
                             <a:srgbClr val="1B2426"/>
                           </a:solidFill>
@@ -24145,9 +26698,100 @@
                           <a:ea typeface="맑은 고딕" pitchFamily="34" charset="-122"/>
                           <a:cs typeface="맑은 고딕" pitchFamily="34" charset="-120"/>
                         </a:rPr>
-                        <a:t>QS 2027 세계</a:t>
+                        <a:t>말레이시아 공학인증위원회(EAC/BEM) 인정 학위입니다. 워싱턴 어코드 가입국이라 호주·영국·캐나다·미국에서 재인증 없이 전문기술사 등록이 가능합니다.</a:t>
                       </a:r>
-                      <a:endParaRPr lang="en-US" sz="1200" dirty="0">
+                      <a:endParaRPr lang="en-US" sz="1100" dirty="0">
+                        <a:latin typeface="맑은 고딕" charset="0"/>
+                        <a:ea typeface="맑은 고딕" charset="0"/>
+                        <a:cs typeface="맑은 고딕" charset="0"/>
+                      </a:endParaRPr>
+                    </a:p>
+                  </a:txBody>
+                  <a:tcPr marL="88900" marR="88900" marT="50800" marB="50800" anchor="ctr">
+                    <a:lnL w="6350" cap="flat" cmpd="sng" algn="ctr">
+                      <a:solidFill>
+                        <a:srgbClr val="DCD6C9"/>
+                      </a:solidFill>
+                      <a:prstDash val="solid"/>
+                      <a:round/>
+                      <a:headEnd type="none" w="med" len="med"/>
+                      <a:tailEnd type="none" w="med" len="med"/>
+                    </a:lnL>
+                    <a:lnR w="6350" cap="flat" cmpd="sng" algn="ctr">
+                      <a:solidFill>
+                        <a:srgbClr val="DCD6C9"/>
+                      </a:solidFill>
+                      <a:prstDash val="solid"/>
+                      <a:round/>
+                      <a:headEnd type="none" w="med" len="med"/>
+                      <a:tailEnd type="none" w="med" len="med"/>
+                    </a:lnR>
+                    <a:lnT w="6350" cap="flat" cmpd="sng" algn="ctr">
+                      <a:solidFill>
+                        <a:srgbClr val="DCD6C9"/>
+                      </a:solidFill>
+                      <a:prstDash val="solid"/>
+                      <a:round/>
+                      <a:headEnd type="none" w="med" len="med"/>
+                      <a:tailEnd type="none" w="med" len="med"/>
+                    </a:lnT>
+                    <a:lnB w="6350" cap="flat" cmpd="sng" algn="ctr">
+                      <a:solidFill>
+                        <a:srgbClr val="DCD6C9"/>
+                      </a:solidFill>
+                      <a:prstDash val="solid"/>
+                      <a:round/>
+                      <a:headEnd type="none" w="med" len="med"/>
+                      <a:tailEnd type="none" w="med" len="med"/>
+                    </a:lnB>
+                    <a:solidFill>
+                      <a:srgbClr val="FFFFFF"/>
+                    </a:solidFill>
+                  </a:tcPr>
+                </a:tc>
+              </a:tr>
+              <a:tr h="621792">
+                <a:tc>
+                  <a:txBody>
+                    <a:bodyPr/>
+                    <a:lstStyle/>
+                    <a:p>
+                      <a:pPr indent="0" marL="0">
+                        <a:buNone/>
+                      </a:pPr>
+                      <a:r>
+                        <a:rPr lang="en-US" sz="1100" dirty="0">
+                          <a:solidFill>
+                            <a:srgbClr val="1B2426"/>
+                          </a:solidFill>
+                          <a:latin typeface="맑은 고딕" pitchFamily="34" charset="0"/>
+                          <a:ea typeface="맑은 고딕" pitchFamily="34" charset="-122"/>
+                          <a:cs typeface="맑은 고딕" pitchFamily="34" charset="-120"/>
+                        </a:rPr>
+                        <a:t>선웨이</a:t>
+                      </a:r>
+                      <a:endParaRPr lang="en-US" sz="1100" dirty="0">
+                        <a:latin typeface="맑은 고딕" charset="0"/>
+                        <a:ea typeface="맑은 고딕" charset="0"/>
+                        <a:cs typeface="맑은 고딕" charset="0"/>
+                      </a:endParaRPr>
+                    </a:p>
+                    <a:p>
+                      <a:pPr indent="0" marL="0">
+                        <a:buNone/>
+                      </a:pPr>
+                      <a:r>
+                        <a:rPr lang="en-US" sz="1100" dirty="0">
+                          <a:solidFill>
+                            <a:srgbClr val="1B2426"/>
+                          </a:solidFill>
+                          <a:latin typeface="맑은 고딕" pitchFamily="34" charset="0"/>
+                          <a:ea typeface="맑은 고딕" pitchFamily="34" charset="-122"/>
+                          <a:cs typeface="맑은 고딕" pitchFamily="34" charset="-120"/>
+                        </a:rPr>
+                        <a:t>(1편)</a:t>
+                      </a:r>
+                      <a:endParaRPr lang="en-US" sz="1100" dirty="0">
                         <a:latin typeface="맑은 고딕" charset="0"/>
                         <a:ea typeface="맑은 고딕" charset="0"/>
                         <a:cs typeface="맑은 고딕" charset="0"/>
@@ -24205,7 +26849,7 @@
                         <a:buNone/>
                       </a:pPr>
                       <a:r>
-                        <a:rPr lang="en-US" sz="1200" dirty="0">
+                        <a:rPr lang="en-US" sz="1100" dirty="0">
                           <a:solidFill>
                             <a:srgbClr val="1B2426"/>
                           </a:solidFill>
@@ -24213,9 +26857,9 @@
                           <a:ea typeface="맑은 고딕" pitchFamily="34" charset="-122"/>
                           <a:cs typeface="맑은 고딕" pitchFamily="34" charset="-120"/>
                         </a:rPr>
-                        <a:t>272위</a:t>
+                        <a:t>4년</a:t>
                       </a:r>
-                      <a:endParaRPr lang="en-US" sz="1200" dirty="0">
+                      <a:endParaRPr lang="en-US" sz="1100" dirty="0">
                         <a:latin typeface="맑은 고딕" charset="0"/>
                         <a:ea typeface="맑은 고딕" charset="0"/>
                         <a:cs typeface="맑은 고딕" charset="0"/>
@@ -24273,7 +26917,7 @@
                         <a:buNone/>
                       </a:pPr>
                       <a:r>
-                        <a:rPr lang="en-US" sz="1200" dirty="0">
+                        <a:rPr lang="en-US" sz="1100" dirty="0">
                           <a:solidFill>
                             <a:srgbClr val="1B2426"/>
                           </a:solidFill>
@@ -24281,9 +26925,30 @@
                           <a:ea typeface="맑은 고딕" pitchFamily="34" charset="-122"/>
                           <a:cs typeface="맑은 고딕" pitchFamily="34" charset="-120"/>
                         </a:rPr>
-                        <a:t>354위 (전년 대비 +50)</a:t>
+                        <a:t>BEng (Hons)</a:t>
                       </a:r>
-                      <a:endParaRPr lang="en-US" sz="1200" dirty="0">
+                      <a:endParaRPr lang="en-US" sz="1100" dirty="0">
+                        <a:latin typeface="맑은 고딕" charset="0"/>
+                        <a:ea typeface="맑은 고딕" charset="0"/>
+                        <a:cs typeface="맑은 고딕" charset="0"/>
+                      </a:endParaRPr>
+                    </a:p>
+                    <a:p>
+                      <a:pPr indent="0" marL="0">
+                        <a:buNone/>
+                      </a:pPr>
+                      <a:r>
+                        <a:rPr lang="en-US" sz="1100" dirty="0">
+                          <a:solidFill>
+                            <a:srgbClr val="1B2426"/>
+                          </a:solidFill>
+                          <a:latin typeface="맑은 고딕" pitchFamily="34" charset="0"/>
+                          <a:ea typeface="맑은 고딕" pitchFamily="34" charset="-122"/>
+                          <a:cs typeface="맑은 고딕" pitchFamily="34" charset="-120"/>
+                        </a:rPr>
+                        <a:t>+ 랭커스터 MEng (Hons)</a:t>
+                      </a:r>
+                      <a:endParaRPr lang="en-US" sz="1100" dirty="0">
                         <a:latin typeface="맑은 고딕" charset="0"/>
                         <a:ea typeface="맑은 고딕" charset="0"/>
                         <a:cs typeface="맑은 고딕" charset="0"/>
@@ -24332,8 +26997,6 @@
                     </a:solidFill>
                   </a:tcPr>
                 </a:tc>
-              </a:tr>
-              <a:tr h="429768">
                 <a:tc>
                   <a:txBody>
                     <a:bodyPr/>
@@ -24343,7 +27006,7 @@
                         <a:buNone/>
                       </a:pPr>
                       <a:r>
-                        <a:rPr lang="en-US" sz="1200" dirty="0">
+                        <a:rPr lang="en-US" sz="1100" dirty="0">
                           <a:solidFill>
                             <a:srgbClr val="1B2426"/>
                           </a:solidFill>
@@ -24351,9 +27014,100 @@
                           <a:ea typeface="맑은 고딕" pitchFamily="34" charset="-122"/>
                           <a:cs typeface="맑은 고딕" pitchFamily="34" charset="-120"/>
                         </a:rPr>
-                        <a:t>강세 전공</a:t>
+                        <a:t>선웨이 BEng 학위와 함께 영국 랭커스터대의 MEng (Hons) 학위가 복수로 수여됩니다. 네 학교 중 유일하게 학위증 두 장이 나옵니다.</a:t>
                       </a:r>
-                      <a:endParaRPr lang="en-US" sz="1200" dirty="0">
+                      <a:endParaRPr lang="en-US" sz="1100" dirty="0">
+                        <a:latin typeface="맑은 고딕" charset="0"/>
+                        <a:ea typeface="맑은 고딕" charset="0"/>
+                        <a:cs typeface="맑은 고딕" charset="0"/>
+                      </a:endParaRPr>
+                    </a:p>
+                  </a:txBody>
+                  <a:tcPr marL="88900" marR="88900" marT="50800" marB="50800" anchor="ctr">
+                    <a:lnL w="6350" cap="flat" cmpd="sng" algn="ctr">
+                      <a:solidFill>
+                        <a:srgbClr val="DCD6C9"/>
+                      </a:solidFill>
+                      <a:prstDash val="solid"/>
+                      <a:round/>
+                      <a:headEnd type="none" w="med" len="med"/>
+                      <a:tailEnd type="none" w="med" len="med"/>
+                    </a:lnL>
+                    <a:lnR w="6350" cap="flat" cmpd="sng" algn="ctr">
+                      <a:solidFill>
+                        <a:srgbClr val="DCD6C9"/>
+                      </a:solidFill>
+                      <a:prstDash val="solid"/>
+                      <a:round/>
+                      <a:headEnd type="none" w="med" len="med"/>
+                      <a:tailEnd type="none" w="med" len="med"/>
+                    </a:lnR>
+                    <a:lnT w="6350" cap="flat" cmpd="sng" algn="ctr">
+                      <a:solidFill>
+                        <a:srgbClr val="DCD6C9"/>
+                      </a:solidFill>
+                      <a:prstDash val="solid"/>
+                      <a:round/>
+                      <a:headEnd type="none" w="med" len="med"/>
+                      <a:tailEnd type="none" w="med" len="med"/>
+                    </a:lnT>
+                    <a:lnB w="6350" cap="flat" cmpd="sng" algn="ctr">
+                      <a:solidFill>
+                        <a:srgbClr val="DCD6C9"/>
+                      </a:solidFill>
+                      <a:prstDash val="solid"/>
+                      <a:round/>
+                      <a:headEnd type="none" w="med" len="med"/>
+                      <a:tailEnd type="none" w="med" len="med"/>
+                    </a:lnB>
+                    <a:solidFill>
+                      <a:srgbClr val="F1EDE4"/>
+                    </a:solidFill>
+                  </a:tcPr>
+                </a:tc>
+              </a:tr>
+              <a:tr h="621792">
+                <a:tc>
+                  <a:txBody>
+                    <a:bodyPr/>
+                    <a:lstStyle/>
+                    <a:p>
+                      <a:pPr indent="0" marL="0">
+                        <a:buNone/>
+                      </a:pPr>
+                      <a:r>
+                        <a:rPr lang="en-US" sz="1100" dirty="0">
+                          <a:solidFill>
+                            <a:srgbClr val="1B2426"/>
+                          </a:solidFill>
+                          <a:latin typeface="맑은 고딕" pitchFamily="34" charset="0"/>
+                          <a:ea typeface="맑은 고딕" pitchFamily="34" charset="-122"/>
+                          <a:cs typeface="맑은 고딕" pitchFamily="34" charset="-120"/>
+                        </a:rPr>
+                        <a:t>모나쉬 말레이시아</a:t>
+                      </a:r>
+                      <a:endParaRPr lang="en-US" sz="1100" dirty="0">
+                        <a:latin typeface="맑은 고딕" charset="0"/>
+                        <a:ea typeface="맑은 고딕" charset="0"/>
+                        <a:cs typeface="맑은 고딕" charset="0"/>
+                      </a:endParaRPr>
+                    </a:p>
+                    <a:p>
+                      <a:pPr indent="0" marL="0">
+                        <a:buNone/>
+                      </a:pPr>
+                      <a:r>
+                        <a:rPr lang="en-US" sz="1100" dirty="0">
+                          <a:solidFill>
+                            <a:srgbClr val="1B2426"/>
+                          </a:solidFill>
+                          <a:latin typeface="맑은 고딕" pitchFamily="34" charset="0"/>
+                          <a:ea typeface="맑은 고딕" pitchFamily="34" charset="-122"/>
+                          <a:cs typeface="맑은 고딕" pitchFamily="34" charset="-120"/>
+                        </a:rPr>
+                        <a:t>(2편)</a:t>
+                      </a:r>
+                      <a:endParaRPr lang="en-US" sz="1100" dirty="0">
                         <a:latin typeface="맑은 고딕" charset="0"/>
                         <a:ea typeface="맑은 고딕" charset="0"/>
                         <a:cs typeface="맑은 고딕" charset="0"/>
@@ -24411,7 +27165,7 @@
                         <a:buNone/>
                       </a:pPr>
                       <a:r>
-                        <a:rPr lang="en-US" sz="1200" dirty="0">
+                        <a:rPr lang="en-US" sz="1100" dirty="0">
                           <a:solidFill>
                             <a:srgbClr val="1B2426"/>
                           </a:solidFill>
@@ -24419,9 +27173,9 @@
                           <a:ea typeface="맑은 고딕" pitchFamily="34" charset="-122"/>
                           <a:cs typeface="맑은 고딕" pitchFamily="34" charset="-120"/>
                         </a:rPr>
-                        <a:t>호텔·관광 세계 26위, 디자인, 마케팅</a:t>
+                        <a:t>4년</a:t>
                       </a:r>
-                      <a:endParaRPr lang="en-US" sz="1200" dirty="0">
+                      <a:endParaRPr lang="en-US" sz="1100" dirty="0">
                         <a:latin typeface="맑은 고딕" charset="0"/>
                         <a:ea typeface="맑은 고딕" charset="0"/>
                         <a:cs typeface="맑은 고딕" charset="0"/>
@@ -24479,7 +27233,7 @@
                         <a:buNone/>
                       </a:pPr>
                       <a:r>
-                        <a:rPr lang="en-US" sz="1200" dirty="0">
+                        <a:rPr lang="en-US" sz="1100" dirty="0">
                           <a:solidFill>
                             <a:srgbClr val="1B2426"/>
                           </a:solidFill>
@@ -24487,9 +27241,30 @@
                           <a:ea typeface="맑은 고딕" pitchFamily="34" charset="-122"/>
                           <a:cs typeface="맑은 고딕" pitchFamily="34" charset="-120"/>
                         </a:rPr>
-                        <a:t>회계·금융, 계리학, 컴퓨터과학</a:t>
+                        <a:t>Bachelor of Engineering</a:t>
                       </a:r>
-                      <a:endParaRPr lang="en-US" sz="1200" dirty="0">
+                      <a:endParaRPr lang="en-US" sz="1100" dirty="0">
+                        <a:latin typeface="맑은 고딕" charset="0"/>
+                        <a:ea typeface="맑은 고딕" charset="0"/>
+                        <a:cs typeface="맑은 고딕" charset="0"/>
+                      </a:endParaRPr>
+                    </a:p>
+                    <a:p>
+                      <a:pPr indent="0" marL="0">
+                        <a:buNone/>
+                      </a:pPr>
+                      <a:r>
+                        <a:rPr lang="en-US" sz="1100" dirty="0">
+                          <a:solidFill>
+                            <a:srgbClr val="1B2426"/>
+                          </a:solidFill>
+                          <a:latin typeface="맑은 고딕" pitchFamily="34" charset="0"/>
+                          <a:ea typeface="맑은 고딕" pitchFamily="34" charset="-122"/>
+                          <a:cs typeface="맑은 고딕" pitchFamily="34" charset="-120"/>
+                        </a:rPr>
+                        <a:t>(Honours)</a:t>
+                      </a:r>
+                      <a:endParaRPr lang="en-US" sz="1100" dirty="0">
                         <a:latin typeface="맑은 고딕" charset="0"/>
                         <a:ea typeface="맑은 고딕" charset="0"/>
                         <a:cs typeface="맑은 고딕" charset="0"/>
@@ -24538,8 +27313,6 @@
                     </a:solidFill>
                   </a:tcPr>
                 </a:tc>
-              </a:tr>
-              <a:tr h="429768">
                 <a:tc>
                   <a:txBody>
                     <a:bodyPr/>
@@ -24549,7 +27322,7 @@
                         <a:buNone/>
                       </a:pPr>
                       <a:r>
-                        <a:rPr lang="en-US" sz="1200" dirty="0">
+                        <a:rPr lang="en-US" sz="1100" dirty="0">
                           <a:solidFill>
                             <a:srgbClr val="1B2426"/>
                           </a:solidFill>
@@ -24557,9 +27330,100 @@
                           <a:ea typeface="맑은 고딕" pitchFamily="34" charset="-122"/>
                           <a:cs typeface="맑은 고딕" pitchFamily="34" charset="-120"/>
                         </a:rPr>
-                        <a:t>전공 폭</a:t>
+                        <a:t>호주 학제를 따릅니다. Honours가 과정 안에 포함된 4년제이며, 호주 자격체계(AQF) 8등급 — 학사 중 가장 높은 등급입니다.</a:t>
                       </a:r>
-                      <a:endParaRPr lang="en-US" sz="1200" dirty="0">
+                      <a:endParaRPr lang="en-US" sz="1100" dirty="0">
+                        <a:latin typeface="맑은 고딕" charset="0"/>
+                        <a:ea typeface="맑은 고딕" charset="0"/>
+                        <a:cs typeface="맑은 고딕" charset="0"/>
+                      </a:endParaRPr>
+                    </a:p>
+                  </a:txBody>
+                  <a:tcPr marL="88900" marR="88900" marT="50800" marB="50800" anchor="ctr">
+                    <a:lnL w="6350" cap="flat" cmpd="sng" algn="ctr">
+                      <a:solidFill>
+                        <a:srgbClr val="DCD6C9"/>
+                      </a:solidFill>
+                      <a:prstDash val="solid"/>
+                      <a:round/>
+                      <a:headEnd type="none" w="med" len="med"/>
+                      <a:tailEnd type="none" w="med" len="med"/>
+                    </a:lnL>
+                    <a:lnR w="6350" cap="flat" cmpd="sng" algn="ctr">
+                      <a:solidFill>
+                        <a:srgbClr val="DCD6C9"/>
+                      </a:solidFill>
+                      <a:prstDash val="solid"/>
+                      <a:round/>
+                      <a:headEnd type="none" w="med" len="med"/>
+                      <a:tailEnd type="none" w="med" len="med"/>
+                    </a:lnR>
+                    <a:lnT w="6350" cap="flat" cmpd="sng" algn="ctr">
+                      <a:solidFill>
+                        <a:srgbClr val="DCD6C9"/>
+                      </a:solidFill>
+                      <a:prstDash val="solid"/>
+                      <a:round/>
+                      <a:headEnd type="none" w="med" len="med"/>
+                      <a:tailEnd type="none" w="med" len="med"/>
+                    </a:lnT>
+                    <a:lnB w="6350" cap="flat" cmpd="sng" algn="ctr">
+                      <a:solidFill>
+                        <a:srgbClr val="DCD6C9"/>
+                      </a:solidFill>
+                      <a:prstDash val="solid"/>
+                      <a:round/>
+                      <a:headEnd type="none" w="med" len="med"/>
+                      <a:tailEnd type="none" w="med" len="med"/>
+                    </a:lnB>
+                    <a:solidFill>
+                      <a:srgbClr val="FFFFFF"/>
+                    </a:solidFill>
+                  </a:tcPr>
+                </a:tc>
+              </a:tr>
+              <a:tr h="621792">
+                <a:tc>
+                  <a:txBody>
+                    <a:bodyPr/>
+                    <a:lstStyle/>
+                    <a:p>
+                      <a:pPr indent="0" marL="0">
+                        <a:buNone/>
+                      </a:pPr>
+                      <a:r>
+                        <a:rPr lang="en-US" sz="1100" dirty="0">
+                          <a:solidFill>
+                            <a:srgbClr val="1B2426"/>
+                          </a:solidFill>
+                          <a:latin typeface="맑은 고딕" pitchFamily="34" charset="0"/>
+                          <a:ea typeface="맑은 고딕" pitchFamily="34" charset="-122"/>
+                          <a:cs typeface="맑은 고딕" pitchFamily="34" charset="-120"/>
+                        </a:rPr>
+                        <a:t>노팅엄 말레이시아</a:t>
+                      </a:r>
+                      <a:endParaRPr lang="en-US" sz="1100" dirty="0">
+                        <a:latin typeface="맑은 고딕" charset="0"/>
+                        <a:ea typeface="맑은 고딕" charset="0"/>
+                        <a:cs typeface="맑은 고딕" charset="0"/>
+                      </a:endParaRPr>
+                    </a:p>
+                    <a:p>
+                      <a:pPr indent="0" marL="0">
+                        <a:buNone/>
+                      </a:pPr>
+                      <a:r>
+                        <a:rPr lang="en-US" sz="1100" dirty="0">
+                          <a:solidFill>
+                            <a:srgbClr val="1B2426"/>
+                          </a:solidFill>
+                          <a:latin typeface="맑은 고딕" pitchFamily="34" charset="0"/>
+                          <a:ea typeface="맑은 고딕" pitchFamily="34" charset="-122"/>
+                          <a:cs typeface="맑은 고딕" pitchFamily="34" charset="-120"/>
+                        </a:rPr>
+                        <a:t>(2편)</a:t>
+                      </a:r>
+                      <a:endParaRPr lang="en-US" sz="1100" dirty="0">
                         <a:latin typeface="맑은 고딕" charset="0"/>
                         <a:ea typeface="맑은 고딕" charset="0"/>
                         <a:cs typeface="맑은 고딕" charset="0"/>
@@ -24617,7 +27481,7 @@
                         <a:buNone/>
                       </a:pPr>
                       <a:r>
-                        <a:rPr lang="en-US" sz="1200" dirty="0">
+                        <a:rPr lang="en-US" sz="1100" dirty="0">
                           <a:solidFill>
                             <a:srgbClr val="1B2426"/>
                           </a:solidFill>
@@ -24625,9 +27489,9 @@
                           <a:ea typeface="맑은 고딕" pitchFamily="34" charset="-122"/>
                           <a:cs typeface="맑은 고딕" pitchFamily="34" charset="-120"/>
                         </a:rPr>
-                        <a:t>12개 계열 (공연예술·역사까지)</a:t>
+                        <a:t>4년</a:t>
                       </a:r>
-                      <a:endParaRPr lang="en-US" sz="1200" dirty="0">
+                      <a:endParaRPr lang="en-US" sz="1100" dirty="0">
                         <a:latin typeface="맑은 고딕" charset="0"/>
                         <a:ea typeface="맑은 고딕" charset="0"/>
                         <a:cs typeface="맑은 고딕" charset="0"/>
@@ -24685,7 +27549,7 @@
                         <a:buNone/>
                       </a:pPr>
                       <a:r>
-                        <a:rPr lang="en-US" sz="1200" dirty="0">
+                        <a:rPr lang="en-US" sz="1100" dirty="0">
                           <a:solidFill>
                             <a:srgbClr val="1B2426"/>
                           </a:solidFill>
@@ -24693,69 +27557,20 @@
                           <a:ea typeface="맑은 고딕" pitchFamily="34" charset="-122"/>
                           <a:cs typeface="맑은 고딕" pitchFamily="34" charset="-120"/>
                         </a:rPr>
-                        <a:t>비즈니스 · CS · STEM 중심</a:t>
+                        <a:t>MEng (Hons)</a:t>
                       </a:r>
-                      <a:endParaRPr lang="en-US" sz="1200" dirty="0">
+                      <a:endParaRPr lang="en-US" sz="1100" dirty="0">
                         <a:latin typeface="맑은 고딕" charset="0"/>
                         <a:ea typeface="맑은 고딕" charset="0"/>
                         <a:cs typeface="맑은 고딕" charset="0"/>
                       </a:endParaRPr>
                     </a:p>
-                  </a:txBody>
-                  <a:tcPr marL="88900" marR="88900" marT="50800" marB="50800" anchor="ctr">
-                    <a:lnL w="6350" cap="flat" cmpd="sng" algn="ctr">
-                      <a:solidFill>
-                        <a:srgbClr val="DCD6C9"/>
-                      </a:solidFill>
-                      <a:prstDash val="solid"/>
-                      <a:round/>
-                      <a:headEnd type="none" w="med" len="med"/>
-                      <a:tailEnd type="none" w="med" len="med"/>
-                    </a:lnL>
-                    <a:lnR w="6350" cap="flat" cmpd="sng" algn="ctr">
-                      <a:solidFill>
-                        <a:srgbClr val="DCD6C9"/>
-                      </a:solidFill>
-                      <a:prstDash val="solid"/>
-                      <a:round/>
-                      <a:headEnd type="none" w="med" len="med"/>
-                      <a:tailEnd type="none" w="med" len="med"/>
-                    </a:lnR>
-                    <a:lnT w="6350" cap="flat" cmpd="sng" algn="ctr">
-                      <a:solidFill>
-                        <a:srgbClr val="DCD6C9"/>
-                      </a:solidFill>
-                      <a:prstDash val="solid"/>
-                      <a:round/>
-                      <a:headEnd type="none" w="med" len="med"/>
-                      <a:tailEnd type="none" w="med" len="med"/>
-                    </a:lnT>
-                    <a:lnB w="6350" cap="flat" cmpd="sng" algn="ctr">
-                      <a:solidFill>
-                        <a:srgbClr val="DCD6C9"/>
-                      </a:solidFill>
-                      <a:prstDash val="solid"/>
-                      <a:round/>
-                      <a:headEnd type="none" w="med" len="med"/>
-                      <a:tailEnd type="none" w="med" len="med"/>
-                    </a:lnB>
-                    <a:solidFill>
-                      <a:srgbClr val="F1EDE4"/>
-                    </a:solidFill>
-                  </a:tcPr>
-                </a:tc>
-              </a:tr>
-              <a:tr h="429768">
-                <a:tc>
-                  <a:txBody>
-                    <a:bodyPr/>
-                    <a:lstStyle/>
                     <a:p>
                       <a:pPr indent="0" marL="0">
                         <a:buNone/>
                       </a:pPr>
                       <a:r>
-                        <a:rPr lang="en-US" sz="1200" dirty="0">
+                        <a:rPr lang="en-US" sz="1100" dirty="0">
                           <a:solidFill>
                             <a:srgbClr val="1B2426"/>
                           </a:solidFill>
@@ -24763,215 +27578,9 @@
                           <a:ea typeface="맑은 고딕" pitchFamily="34" charset="-122"/>
                           <a:cs typeface="맑은 고딕" pitchFamily="34" charset="-120"/>
                         </a:rPr>
-                        <a:t>직행 가능 계열</a:t>
+                        <a:t>석사통합 학위</a:t>
                       </a:r>
-                      <a:endParaRPr lang="en-US" sz="1200" dirty="0">
-                        <a:latin typeface="맑은 고딕" charset="0"/>
-                        <a:ea typeface="맑은 고딕" charset="0"/>
-                        <a:cs typeface="맑은 고딕" charset="0"/>
-                      </a:endParaRPr>
-                    </a:p>
-                  </a:txBody>
-                  <a:tcPr marL="88900" marR="88900" marT="50800" marB="50800" anchor="ctr">
-                    <a:lnL w="6350" cap="flat" cmpd="sng" algn="ctr">
-                      <a:solidFill>
-                        <a:srgbClr val="DCD6C9"/>
-                      </a:solidFill>
-                      <a:prstDash val="solid"/>
-                      <a:round/>
-                      <a:headEnd type="none" w="med" len="med"/>
-                      <a:tailEnd type="none" w="med" len="med"/>
-                    </a:lnL>
-                    <a:lnR w="6350" cap="flat" cmpd="sng" algn="ctr">
-                      <a:solidFill>
-                        <a:srgbClr val="DCD6C9"/>
-                      </a:solidFill>
-                      <a:prstDash val="solid"/>
-                      <a:round/>
-                      <a:headEnd type="none" w="med" len="med"/>
-                      <a:tailEnd type="none" w="med" len="med"/>
-                    </a:lnR>
-                    <a:lnT w="6350" cap="flat" cmpd="sng" algn="ctr">
-                      <a:solidFill>
-                        <a:srgbClr val="DCD6C9"/>
-                      </a:solidFill>
-                      <a:prstDash val="solid"/>
-                      <a:round/>
-                      <a:headEnd type="none" w="med" len="med"/>
-                      <a:tailEnd type="none" w="med" len="med"/>
-                    </a:lnT>
-                    <a:lnB w="6350" cap="flat" cmpd="sng" algn="ctr">
-                      <a:solidFill>
-                        <a:srgbClr val="DCD6C9"/>
-                      </a:solidFill>
-                      <a:prstDash val="solid"/>
-                      <a:round/>
-                      <a:headEnd type="none" w="med" len="med"/>
-                      <a:tailEnd type="none" w="med" len="med"/>
-                    </a:lnB>
-                    <a:solidFill>
-                      <a:srgbClr val="FFFFFF"/>
-                    </a:solidFill>
-                  </a:tcPr>
-                </a:tc>
-                <a:tc>
-                  <a:txBody>
-                    <a:bodyPr/>
-                    <a:lstStyle/>
-                    <a:p>
-                      <a:pPr indent="0" marL="0">
-                        <a:buNone/>
-                      </a:pPr>
-                      <a:r>
-                        <a:rPr lang="en-US" sz="1200" dirty="0">
-                          <a:solidFill>
-                            <a:srgbClr val="1B2426"/>
-                          </a:solidFill>
-                          <a:latin typeface="맑은 고딕" pitchFamily="34" charset="0"/>
-                          <a:ea typeface="맑은 고딕" pitchFamily="34" charset="-122"/>
-                          <a:cs typeface="맑은 고딕" pitchFamily="34" charset="-120"/>
-                        </a:rPr>
-                        <a:t>호텔경영·관광, 경영학 전체</a:t>
-                      </a:r>
-                      <a:endParaRPr lang="en-US" sz="1200" dirty="0">
-                        <a:latin typeface="맑은 고딕" charset="0"/>
-                        <a:ea typeface="맑은 고딕" charset="0"/>
-                        <a:cs typeface="맑은 고딕" charset="0"/>
-                      </a:endParaRPr>
-                    </a:p>
-                  </a:txBody>
-                  <a:tcPr marL="88900" marR="88900" marT="50800" marB="50800" anchor="ctr">
-                    <a:lnL w="6350" cap="flat" cmpd="sng" algn="ctr">
-                      <a:solidFill>
-                        <a:srgbClr val="DCD6C9"/>
-                      </a:solidFill>
-                      <a:prstDash val="solid"/>
-                      <a:round/>
-                      <a:headEnd type="none" w="med" len="med"/>
-                      <a:tailEnd type="none" w="med" len="med"/>
-                    </a:lnL>
-                    <a:lnR w="6350" cap="flat" cmpd="sng" algn="ctr">
-                      <a:solidFill>
-                        <a:srgbClr val="DCD6C9"/>
-                      </a:solidFill>
-                      <a:prstDash val="solid"/>
-                      <a:round/>
-                      <a:headEnd type="none" w="med" len="med"/>
-                      <a:tailEnd type="none" w="med" len="med"/>
-                    </a:lnR>
-                    <a:lnT w="6350" cap="flat" cmpd="sng" algn="ctr">
-                      <a:solidFill>
-                        <a:srgbClr val="DCD6C9"/>
-                      </a:solidFill>
-                      <a:prstDash val="solid"/>
-                      <a:round/>
-                      <a:headEnd type="none" w="med" len="med"/>
-                      <a:tailEnd type="none" w="med" len="med"/>
-                    </a:lnT>
-                    <a:lnB w="6350" cap="flat" cmpd="sng" algn="ctr">
-                      <a:solidFill>
-                        <a:srgbClr val="DCD6C9"/>
-                      </a:solidFill>
-                      <a:prstDash val="solid"/>
-                      <a:round/>
-                      <a:headEnd type="none" w="med" len="med"/>
-                      <a:tailEnd type="none" w="med" len="med"/>
-                    </a:lnB>
-                    <a:solidFill>
-                      <a:srgbClr val="FFFFFF"/>
-                    </a:solidFill>
-                  </a:tcPr>
-                </a:tc>
-                <a:tc>
-                  <a:txBody>
-                    <a:bodyPr/>
-                    <a:lstStyle/>
-                    <a:p>
-                      <a:pPr indent="0" marL="0">
-                        <a:buNone/>
-                      </a:pPr>
-                      <a:r>
-                        <a:rPr lang="en-US" sz="1200" dirty="0">
-                          <a:solidFill>
-                            <a:srgbClr val="1B2426"/>
-                          </a:solidFill>
-                          <a:latin typeface="맑은 고딕" pitchFamily="34" charset="0"/>
-                          <a:ea typeface="맑은 고딕" pitchFamily="34" charset="-122"/>
-                          <a:cs typeface="맑은 고딕" pitchFamily="34" charset="-120"/>
-                        </a:rPr>
-                        <a:t>BA 인문사회 전반, BSc 경영·호텔경영</a:t>
-                      </a:r>
-                      <a:endParaRPr lang="en-US" sz="1200" dirty="0">
-                        <a:latin typeface="맑은 고딕" charset="0"/>
-                        <a:ea typeface="맑은 고딕" charset="0"/>
-                        <a:cs typeface="맑은 고딕" charset="0"/>
-                      </a:endParaRPr>
-                    </a:p>
-                  </a:txBody>
-                  <a:tcPr marL="88900" marR="88900" marT="50800" marB="50800" anchor="ctr">
-                    <a:lnL w="6350" cap="flat" cmpd="sng" algn="ctr">
-                      <a:solidFill>
-                        <a:srgbClr val="DCD6C9"/>
-                      </a:solidFill>
-                      <a:prstDash val="solid"/>
-                      <a:round/>
-                      <a:headEnd type="none" w="med" len="med"/>
-                      <a:tailEnd type="none" w="med" len="med"/>
-                    </a:lnL>
-                    <a:lnR w="6350" cap="flat" cmpd="sng" algn="ctr">
-                      <a:solidFill>
-                        <a:srgbClr val="DCD6C9"/>
-                      </a:solidFill>
-                      <a:prstDash val="solid"/>
-                      <a:round/>
-                      <a:headEnd type="none" w="med" len="med"/>
-                      <a:tailEnd type="none" w="med" len="med"/>
-                    </a:lnR>
-                    <a:lnT w="6350" cap="flat" cmpd="sng" algn="ctr">
-                      <a:solidFill>
-                        <a:srgbClr val="DCD6C9"/>
-                      </a:solidFill>
-                      <a:prstDash val="solid"/>
-                      <a:round/>
-                      <a:headEnd type="none" w="med" len="med"/>
-                      <a:tailEnd type="none" w="med" len="med"/>
-                    </a:lnT>
-                    <a:lnB w="6350" cap="flat" cmpd="sng" algn="ctr">
-                      <a:solidFill>
-                        <a:srgbClr val="DCD6C9"/>
-                      </a:solidFill>
-                      <a:prstDash val="solid"/>
-                      <a:round/>
-                      <a:headEnd type="none" w="med" len="med"/>
-                      <a:tailEnd type="none" w="med" len="med"/>
-                    </a:lnB>
-                    <a:solidFill>
-                      <a:srgbClr val="FFFFFF"/>
-                    </a:solidFill>
-                  </a:tcPr>
-                </a:tc>
-              </a:tr>
-              <a:tr h="429768">
-                <a:tc>
-                  <a:txBody>
-                    <a:bodyPr/>
-                    <a:lstStyle/>
-                    <a:p>
-                      <a:pPr indent="0" marL="0">
-                        <a:buNone/>
-                      </a:pPr>
-                      <a:r>
-                        <a:rPr lang="en-US" sz="1200" dirty="0">
-                          <a:solidFill>
-                            <a:srgbClr val="1B2426"/>
-                          </a:solidFill>
-                          <a:latin typeface="맑은 고딕" pitchFamily="34" charset="0"/>
-                          <a:ea typeface="맑은 고딕" pitchFamily="34" charset="-122"/>
-                          <a:cs typeface="맑은 고딕" pitchFamily="34" charset="-120"/>
-                        </a:rPr>
-                        <a:t>해외 학위</a:t>
-                      </a:r>
-                      <a:endParaRPr lang="en-US" sz="1200" dirty="0">
+                      <a:endParaRPr lang="en-US" sz="1100" dirty="0">
                         <a:latin typeface="맑은 고딕" charset="0"/>
                         <a:ea typeface="맑은 고딕" charset="0"/>
                         <a:cs typeface="맑은 고딕" charset="0"/>
@@ -25029,7 +27638,7 @@
                         <a:buNone/>
                       </a:pPr>
                       <a:r>
-                        <a:rPr lang="en-US" sz="1200" dirty="0">
+                        <a:rPr lang="en-US" sz="1100" dirty="0">
                           <a:solidFill>
                             <a:srgbClr val="1B2426"/>
                           </a:solidFill>
@@ -25037,9 +27646,9 @@
                           <a:ea typeface="맑은 고딕" pitchFamily="34" charset="-122"/>
                           <a:cs typeface="맑은 고딕" pitchFamily="34" charset="-120"/>
                         </a:rPr>
-                        <a:t>ADTP(1996) · UWE 브리스톨 · QUT</a:t>
+                        <a:t>영국 학제를 따릅니다. 학사(BEng)가 아니라 석사통합(MEng)이며, 2+2 또는 3+1로 영국 본교 이동이 가능합니다.</a:t>
                       </a:r>
-                      <a:endParaRPr lang="en-US" sz="1200" dirty="0">
+                      <a:endParaRPr lang="en-US" sz="1100" dirty="0">
                         <a:latin typeface="맑은 고딕" charset="0"/>
                         <a:ea typeface="맑은 고딕" charset="0"/>
                         <a:cs typeface="맑은 고딕" charset="0"/>
@@ -25088,692 +27697,6 @@
                     </a:solidFill>
                   </a:tcPr>
                 </a:tc>
-                <a:tc>
-                  <a:txBody>
-                    <a:bodyPr/>
-                    <a:lstStyle/>
-                    <a:p>
-                      <a:pPr indent="0" marL="0">
-                        <a:buNone/>
-                      </a:pPr>
-                      <a:r>
-                        <a:rPr lang="en-US" sz="1200" dirty="0">
-                          <a:solidFill>
-                            <a:srgbClr val="1B2426"/>
-                          </a:solidFill>
-                          <a:latin typeface="맑은 고딕" pitchFamily="34" charset="0"/>
-                          <a:ea typeface="맑은 고딕" pitchFamily="34" charset="-122"/>
-                          <a:cs typeface="맑은 고딕" pitchFamily="34" charset="-120"/>
-                        </a:rPr>
-                        <a:t>랭커스터 복수학위(추가비 없음) · ASU · ADTP(1987)</a:t>
-                      </a:r>
-                      <a:endParaRPr lang="en-US" sz="1200" dirty="0">
-                        <a:latin typeface="맑은 고딕" charset="0"/>
-                        <a:ea typeface="맑은 고딕" charset="0"/>
-                        <a:cs typeface="맑은 고딕" charset="0"/>
-                      </a:endParaRPr>
-                    </a:p>
-                  </a:txBody>
-                  <a:tcPr marL="88900" marR="88900" marT="50800" marB="50800" anchor="ctr">
-                    <a:lnL w="6350" cap="flat" cmpd="sng" algn="ctr">
-                      <a:solidFill>
-                        <a:srgbClr val="DCD6C9"/>
-                      </a:solidFill>
-                      <a:prstDash val="solid"/>
-                      <a:round/>
-                      <a:headEnd type="none" w="med" len="med"/>
-                      <a:tailEnd type="none" w="med" len="med"/>
-                    </a:lnL>
-                    <a:lnR w="6350" cap="flat" cmpd="sng" algn="ctr">
-                      <a:solidFill>
-                        <a:srgbClr val="DCD6C9"/>
-                      </a:solidFill>
-                      <a:prstDash val="solid"/>
-                      <a:round/>
-                      <a:headEnd type="none" w="med" len="med"/>
-                      <a:tailEnd type="none" w="med" len="med"/>
-                    </a:lnR>
-                    <a:lnT w="6350" cap="flat" cmpd="sng" algn="ctr">
-                      <a:solidFill>
-                        <a:srgbClr val="DCD6C9"/>
-                      </a:solidFill>
-                      <a:prstDash val="solid"/>
-                      <a:round/>
-                      <a:headEnd type="none" w="med" len="med"/>
-                      <a:tailEnd type="none" w="med" len="med"/>
-                    </a:lnT>
-                    <a:lnB w="6350" cap="flat" cmpd="sng" algn="ctr">
-                      <a:solidFill>
-                        <a:srgbClr val="DCD6C9"/>
-                      </a:solidFill>
-                      <a:prstDash val="solid"/>
-                      <a:round/>
-                      <a:headEnd type="none" w="med" len="med"/>
-                      <a:tailEnd type="none" w="med" len="med"/>
-                    </a:lnB>
-                    <a:solidFill>
-                      <a:srgbClr val="F1EDE4"/>
-                    </a:solidFill>
-                  </a:tcPr>
-                </a:tc>
-              </a:tr>
-              <a:tr h="429768">
-                <a:tc>
-                  <a:txBody>
-                    <a:bodyPr/>
-                    <a:lstStyle/>
-                    <a:p>
-                      <a:pPr indent="0" marL="0">
-                        <a:buNone/>
-                      </a:pPr>
-                      <a:r>
-                        <a:rPr lang="en-US" sz="1200" dirty="0">
-                          <a:solidFill>
-                            <a:srgbClr val="1B2426"/>
-                          </a:solidFill>
-                          <a:latin typeface="맑은 고딕" pitchFamily="34" charset="0"/>
-                          <a:ea typeface="맑은 고딕" pitchFamily="34" charset="-122"/>
-                          <a:cs typeface="맑은 고딕" pitchFamily="34" charset="-120"/>
-                        </a:rPr>
-                        <a:t>학사 입학</a:t>
-                      </a:r>
-                      <a:endParaRPr lang="en-US" sz="1200" dirty="0">
-                        <a:latin typeface="맑은 고딕" charset="0"/>
-                        <a:ea typeface="맑은 고딕" charset="0"/>
-                        <a:cs typeface="맑은 고딕" charset="0"/>
-                      </a:endParaRPr>
-                    </a:p>
-                  </a:txBody>
-                  <a:tcPr marL="88900" marR="88900" marT="50800" marB="50800" anchor="ctr">
-                    <a:lnL w="6350" cap="flat" cmpd="sng" algn="ctr">
-                      <a:solidFill>
-                        <a:srgbClr val="DCD6C9"/>
-                      </a:solidFill>
-                      <a:prstDash val="solid"/>
-                      <a:round/>
-                      <a:headEnd type="none" w="med" len="med"/>
-                      <a:tailEnd type="none" w="med" len="med"/>
-                    </a:lnL>
-                    <a:lnR w="6350" cap="flat" cmpd="sng" algn="ctr">
-                      <a:solidFill>
-                        <a:srgbClr val="DCD6C9"/>
-                      </a:solidFill>
-                      <a:prstDash val="solid"/>
-                      <a:round/>
-                      <a:headEnd type="none" w="med" len="med"/>
-                      <a:tailEnd type="none" w="med" len="med"/>
-                    </a:lnR>
-                    <a:lnT w="6350" cap="flat" cmpd="sng" algn="ctr">
-                      <a:solidFill>
-                        <a:srgbClr val="DCD6C9"/>
-                      </a:solidFill>
-                      <a:prstDash val="solid"/>
-                      <a:round/>
-                      <a:headEnd type="none" w="med" len="med"/>
-                      <a:tailEnd type="none" w="med" len="med"/>
-                    </a:lnT>
-                    <a:lnB w="6350" cap="flat" cmpd="sng" algn="ctr">
-                      <a:solidFill>
-                        <a:srgbClr val="DCD6C9"/>
-                      </a:solidFill>
-                      <a:prstDash val="solid"/>
-                      <a:round/>
-                      <a:headEnd type="none" w="med" len="med"/>
-                      <a:tailEnd type="none" w="med" len="med"/>
-                    </a:lnB>
-                    <a:solidFill>
-                      <a:srgbClr val="FFFFFF"/>
-                    </a:solidFill>
-                  </a:tcPr>
-                </a:tc>
-                <a:tc>
-                  <a:txBody>
-                    <a:bodyPr/>
-                    <a:lstStyle/>
-                    <a:p>
-                      <a:pPr indent="0" marL="0">
-                        <a:buNone/>
-                      </a:pPr>
-                      <a:r>
-                        <a:rPr lang="en-US" sz="1200" dirty="0">
-                          <a:solidFill>
-                            <a:srgbClr val="1B2426"/>
-                          </a:solidFill>
-                          <a:latin typeface="맑은 고딕" pitchFamily="34" charset="0"/>
-                          <a:ea typeface="맑은 고딕" pitchFamily="34" charset="-122"/>
-                          <a:cs typeface="맑은 고딕" pitchFamily="34" charset="-120"/>
-                        </a:rPr>
-                        <a:t>2월 · 4월 · 9월</a:t>
-                      </a:r>
-                      <a:endParaRPr lang="en-US" sz="1200" dirty="0">
-                        <a:latin typeface="맑은 고딕" charset="0"/>
-                        <a:ea typeface="맑은 고딕" charset="0"/>
-                        <a:cs typeface="맑은 고딕" charset="0"/>
-                      </a:endParaRPr>
-                    </a:p>
-                  </a:txBody>
-                  <a:tcPr marL="88900" marR="88900" marT="50800" marB="50800" anchor="ctr">
-                    <a:lnL w="6350" cap="flat" cmpd="sng" algn="ctr">
-                      <a:solidFill>
-                        <a:srgbClr val="DCD6C9"/>
-                      </a:solidFill>
-                      <a:prstDash val="solid"/>
-                      <a:round/>
-                      <a:headEnd type="none" w="med" len="med"/>
-                      <a:tailEnd type="none" w="med" len="med"/>
-                    </a:lnL>
-                    <a:lnR w="6350" cap="flat" cmpd="sng" algn="ctr">
-                      <a:solidFill>
-                        <a:srgbClr val="DCD6C9"/>
-                      </a:solidFill>
-                      <a:prstDash val="solid"/>
-                      <a:round/>
-                      <a:headEnd type="none" w="med" len="med"/>
-                      <a:tailEnd type="none" w="med" len="med"/>
-                    </a:lnR>
-                    <a:lnT w="6350" cap="flat" cmpd="sng" algn="ctr">
-                      <a:solidFill>
-                        <a:srgbClr val="DCD6C9"/>
-                      </a:solidFill>
-                      <a:prstDash val="solid"/>
-                      <a:round/>
-                      <a:headEnd type="none" w="med" len="med"/>
-                      <a:tailEnd type="none" w="med" len="med"/>
-                    </a:lnT>
-                    <a:lnB w="6350" cap="flat" cmpd="sng" algn="ctr">
-                      <a:solidFill>
-                        <a:srgbClr val="DCD6C9"/>
-                      </a:solidFill>
-                      <a:prstDash val="solid"/>
-                      <a:round/>
-                      <a:headEnd type="none" w="med" len="med"/>
-                      <a:tailEnd type="none" w="med" len="med"/>
-                    </a:lnB>
-                    <a:solidFill>
-                      <a:srgbClr val="FFFFFF"/>
-                    </a:solidFill>
-                  </a:tcPr>
-                </a:tc>
-                <a:tc>
-                  <a:txBody>
-                    <a:bodyPr/>
-                    <a:lstStyle/>
-                    <a:p>
-                      <a:pPr indent="0" marL="0">
-                        <a:buNone/>
-                      </a:pPr>
-                      <a:r>
-                        <a:rPr lang="en-US" sz="1200" dirty="0">
-                          <a:solidFill>
-                            <a:srgbClr val="1B2426"/>
-                          </a:solidFill>
-                          <a:latin typeface="맑은 고딕" pitchFamily="34" charset="0"/>
-                          <a:ea typeface="맑은 고딕" pitchFamily="34" charset="-122"/>
-                          <a:cs typeface="맑은 고딕" pitchFamily="34" charset="-120"/>
-                        </a:rPr>
-                        <a:t>1월 · 4월 · 9월</a:t>
-                      </a:r>
-                      <a:endParaRPr lang="en-US" sz="1200" dirty="0">
-                        <a:latin typeface="맑은 고딕" charset="0"/>
-                        <a:ea typeface="맑은 고딕" charset="0"/>
-                        <a:cs typeface="맑은 고딕" charset="0"/>
-                      </a:endParaRPr>
-                    </a:p>
-                  </a:txBody>
-                  <a:tcPr marL="88900" marR="88900" marT="50800" marB="50800" anchor="ctr">
-                    <a:lnL w="6350" cap="flat" cmpd="sng" algn="ctr">
-                      <a:solidFill>
-                        <a:srgbClr val="DCD6C9"/>
-                      </a:solidFill>
-                      <a:prstDash val="solid"/>
-                      <a:round/>
-                      <a:headEnd type="none" w="med" len="med"/>
-                      <a:tailEnd type="none" w="med" len="med"/>
-                    </a:lnL>
-                    <a:lnR w="6350" cap="flat" cmpd="sng" algn="ctr">
-                      <a:solidFill>
-                        <a:srgbClr val="DCD6C9"/>
-                      </a:solidFill>
-                      <a:prstDash val="solid"/>
-                      <a:round/>
-                      <a:headEnd type="none" w="med" len="med"/>
-                      <a:tailEnd type="none" w="med" len="med"/>
-                    </a:lnR>
-                    <a:lnT w="6350" cap="flat" cmpd="sng" algn="ctr">
-                      <a:solidFill>
-                        <a:srgbClr val="DCD6C9"/>
-                      </a:solidFill>
-                      <a:prstDash val="solid"/>
-                      <a:round/>
-                      <a:headEnd type="none" w="med" len="med"/>
-                      <a:tailEnd type="none" w="med" len="med"/>
-                    </a:lnT>
-                    <a:lnB w="6350" cap="flat" cmpd="sng" algn="ctr">
-                      <a:solidFill>
-                        <a:srgbClr val="DCD6C9"/>
-                      </a:solidFill>
-                      <a:prstDash val="solid"/>
-                      <a:round/>
-                      <a:headEnd type="none" w="med" len="med"/>
-                      <a:tailEnd type="none" w="med" len="med"/>
-                    </a:lnB>
-                    <a:solidFill>
-                      <a:srgbClr val="FFFFFF"/>
-                    </a:solidFill>
-                  </a:tcPr>
-                </a:tc>
-              </a:tr>
-              <a:tr h="429768">
-                <a:tc>
-                  <a:txBody>
-                    <a:bodyPr/>
-                    <a:lstStyle/>
-                    <a:p>
-                      <a:pPr indent="0" marL="0">
-                        <a:buNone/>
-                      </a:pPr>
-                      <a:r>
-                        <a:rPr lang="en-US" sz="1200" dirty="0">
-                          <a:solidFill>
-                            <a:srgbClr val="1B2426"/>
-                          </a:solidFill>
-                          <a:latin typeface="맑은 고딕" pitchFamily="34" charset="0"/>
-                          <a:ea typeface="맑은 고딕" pitchFamily="34" charset="-122"/>
-                          <a:cs typeface="맑은 고딕" pitchFamily="34" charset="-120"/>
-                        </a:rPr>
-                        <a:t>파운데이션 학비</a:t>
-                      </a:r>
-                      <a:endParaRPr lang="en-US" sz="1200" dirty="0">
-                        <a:latin typeface="맑은 고딕" charset="0"/>
-                        <a:ea typeface="맑은 고딕" charset="0"/>
-                        <a:cs typeface="맑은 고딕" charset="0"/>
-                      </a:endParaRPr>
-                    </a:p>
-                  </a:txBody>
-                  <a:tcPr marL="88900" marR="88900" marT="50800" marB="50800" anchor="ctr">
-                    <a:lnL w="6350" cap="flat" cmpd="sng" algn="ctr">
-                      <a:solidFill>
-                        <a:srgbClr val="DCD6C9"/>
-                      </a:solidFill>
-                      <a:prstDash val="solid"/>
-                      <a:round/>
-                      <a:headEnd type="none" w="med" len="med"/>
-                      <a:tailEnd type="none" w="med" len="med"/>
-                    </a:lnL>
-                    <a:lnR w="6350" cap="flat" cmpd="sng" algn="ctr">
-                      <a:solidFill>
-                        <a:srgbClr val="DCD6C9"/>
-                      </a:solidFill>
-                      <a:prstDash val="solid"/>
-                      <a:round/>
-                      <a:headEnd type="none" w="med" len="med"/>
-                      <a:tailEnd type="none" w="med" len="med"/>
-                    </a:lnR>
-                    <a:lnT w="6350" cap="flat" cmpd="sng" algn="ctr">
-                      <a:solidFill>
-                        <a:srgbClr val="DCD6C9"/>
-                      </a:solidFill>
-                      <a:prstDash val="solid"/>
-                      <a:round/>
-                      <a:headEnd type="none" w="med" len="med"/>
-                      <a:tailEnd type="none" w="med" len="med"/>
-                    </a:lnT>
-                    <a:lnB w="6350" cap="flat" cmpd="sng" algn="ctr">
-                      <a:solidFill>
-                        <a:srgbClr val="DCD6C9"/>
-                      </a:solidFill>
-                      <a:prstDash val="solid"/>
-                      <a:round/>
-                      <a:headEnd type="none" w="med" len="med"/>
-                      <a:tailEnd type="none" w="med" len="med"/>
-                    </a:lnB>
-                    <a:solidFill>
-                      <a:srgbClr val="F1EDE4"/>
-                    </a:solidFill>
-                  </a:tcPr>
-                </a:tc>
-                <a:tc>
-                  <a:txBody>
-                    <a:bodyPr/>
-                    <a:lstStyle/>
-                    <a:p>
-                      <a:pPr indent="0" marL="0">
-                        <a:buNone/>
-                      </a:pPr>
-                      <a:r>
-                        <a:rPr lang="en-US" sz="1200" dirty="0">
-                          <a:solidFill>
-                            <a:srgbClr val="1B2426"/>
-                          </a:solidFill>
-                          <a:latin typeface="맑은 고딕" pitchFamily="34" charset="0"/>
-                          <a:ea typeface="맑은 고딕" pitchFamily="34" charset="-122"/>
-                          <a:cs typeface="맑은 고딕" pitchFamily="34" charset="-120"/>
-                        </a:rPr>
-                        <a:t>RM 44,044 · 약 1,490만 원</a:t>
-                      </a:r>
-                      <a:endParaRPr lang="en-US" sz="1200" dirty="0">
-                        <a:latin typeface="맑은 고딕" charset="0"/>
-                        <a:ea typeface="맑은 고딕" charset="0"/>
-                        <a:cs typeface="맑은 고딕" charset="0"/>
-                      </a:endParaRPr>
-                    </a:p>
-                  </a:txBody>
-                  <a:tcPr marL="88900" marR="88900" marT="50800" marB="50800" anchor="ctr">
-                    <a:lnL w="6350" cap="flat" cmpd="sng" algn="ctr">
-                      <a:solidFill>
-                        <a:srgbClr val="DCD6C9"/>
-                      </a:solidFill>
-                      <a:prstDash val="solid"/>
-                      <a:round/>
-                      <a:headEnd type="none" w="med" len="med"/>
-                      <a:tailEnd type="none" w="med" len="med"/>
-                    </a:lnL>
-                    <a:lnR w="6350" cap="flat" cmpd="sng" algn="ctr">
-                      <a:solidFill>
-                        <a:srgbClr val="DCD6C9"/>
-                      </a:solidFill>
-                      <a:prstDash val="solid"/>
-                      <a:round/>
-                      <a:headEnd type="none" w="med" len="med"/>
-                      <a:tailEnd type="none" w="med" len="med"/>
-                    </a:lnR>
-                    <a:lnT w="6350" cap="flat" cmpd="sng" algn="ctr">
-                      <a:solidFill>
-                        <a:srgbClr val="DCD6C9"/>
-                      </a:solidFill>
-                      <a:prstDash val="solid"/>
-                      <a:round/>
-                      <a:headEnd type="none" w="med" len="med"/>
-                      <a:tailEnd type="none" w="med" len="med"/>
-                    </a:lnT>
-                    <a:lnB w="6350" cap="flat" cmpd="sng" algn="ctr">
-                      <a:solidFill>
-                        <a:srgbClr val="DCD6C9"/>
-                      </a:solidFill>
-                      <a:prstDash val="solid"/>
-                      <a:round/>
-                      <a:headEnd type="none" w="med" len="med"/>
-                      <a:tailEnd type="none" w="med" len="med"/>
-                    </a:lnB>
-                    <a:solidFill>
-                      <a:srgbClr val="F1EDE4"/>
-                    </a:solidFill>
-                  </a:tcPr>
-                </a:tc>
-                <a:tc>
-                  <a:txBody>
-                    <a:bodyPr/>
-                    <a:lstStyle/>
-                    <a:p>
-                      <a:pPr indent="0" marL="0">
-                        <a:buNone/>
-                      </a:pPr>
-                      <a:r>
-                        <a:rPr lang="en-US" sz="1200" dirty="0">
-                          <a:solidFill>
-                            <a:srgbClr val="1B2426"/>
-                          </a:solidFill>
-                          <a:latin typeface="맑은 고딕" pitchFamily="34" charset="0"/>
-                          <a:ea typeface="맑은 고딕" pitchFamily="34" charset="-122"/>
-                          <a:cs typeface="맑은 고딕" pitchFamily="34" charset="-120"/>
-                        </a:rPr>
-                        <a:t>RM 17,850~29,350 · 약 610만~990만 원</a:t>
-                      </a:r>
-                      <a:endParaRPr lang="en-US" sz="1200" dirty="0">
-                        <a:latin typeface="맑은 고딕" charset="0"/>
-                        <a:ea typeface="맑은 고딕" charset="0"/>
-                        <a:cs typeface="맑은 고딕" charset="0"/>
-                      </a:endParaRPr>
-                    </a:p>
-                  </a:txBody>
-                  <a:tcPr marL="88900" marR="88900" marT="50800" marB="50800" anchor="ctr">
-                    <a:lnL w="6350" cap="flat" cmpd="sng" algn="ctr">
-                      <a:solidFill>
-                        <a:srgbClr val="DCD6C9"/>
-                      </a:solidFill>
-                      <a:prstDash val="solid"/>
-                      <a:round/>
-                      <a:headEnd type="none" w="med" len="med"/>
-                      <a:tailEnd type="none" w="med" len="med"/>
-                    </a:lnL>
-                    <a:lnR w="6350" cap="flat" cmpd="sng" algn="ctr">
-                      <a:solidFill>
-                        <a:srgbClr val="DCD6C9"/>
-                      </a:solidFill>
-                      <a:prstDash val="solid"/>
-                      <a:round/>
-                      <a:headEnd type="none" w="med" len="med"/>
-                      <a:tailEnd type="none" w="med" len="med"/>
-                    </a:lnR>
-                    <a:lnT w="6350" cap="flat" cmpd="sng" algn="ctr">
-                      <a:solidFill>
-                        <a:srgbClr val="DCD6C9"/>
-                      </a:solidFill>
-                      <a:prstDash val="solid"/>
-                      <a:round/>
-                      <a:headEnd type="none" w="med" len="med"/>
-                      <a:tailEnd type="none" w="med" len="med"/>
-                    </a:lnT>
-                    <a:lnB w="6350" cap="flat" cmpd="sng" algn="ctr">
-                      <a:solidFill>
-                        <a:srgbClr val="DCD6C9"/>
-                      </a:solidFill>
-                      <a:prstDash val="solid"/>
-                      <a:round/>
-                      <a:headEnd type="none" w="med" len="med"/>
-                      <a:tailEnd type="none" w="med" len="med"/>
-                    </a:lnB>
-                    <a:solidFill>
-                      <a:srgbClr val="F1EDE4"/>
-                    </a:solidFill>
-                  </a:tcPr>
-                </a:tc>
-              </a:tr>
-              <a:tr h="429768">
-                <a:tc>
-                  <a:txBody>
-                    <a:bodyPr/>
-                    <a:lstStyle/>
-                    <a:p>
-                      <a:pPr indent="0" marL="0">
-                        <a:buNone/>
-                      </a:pPr>
-                      <a:r>
-                        <a:rPr lang="en-US" sz="1200" dirty="0">
-                          <a:solidFill>
-                            <a:srgbClr val="1B2426"/>
-                          </a:solidFill>
-                          <a:latin typeface="맑은 고딕" pitchFamily="34" charset="0"/>
-                          <a:ea typeface="맑은 고딕" pitchFamily="34" charset="-122"/>
-                          <a:cs typeface="맑은 고딕" pitchFamily="34" charset="-120"/>
-                        </a:rPr>
-                        <a:t>파운데이션 + 공학 5년</a:t>
-                      </a:r>
-                      <a:endParaRPr lang="en-US" sz="1200" dirty="0">
-                        <a:latin typeface="맑은 고딕" charset="0"/>
-                        <a:ea typeface="맑은 고딕" charset="0"/>
-                        <a:cs typeface="맑은 고딕" charset="0"/>
-                      </a:endParaRPr>
-                    </a:p>
-                  </a:txBody>
-                  <a:tcPr marL="88900" marR="88900" marT="50800" marB="50800" anchor="ctr">
-                    <a:lnL w="6350" cap="flat" cmpd="sng" algn="ctr">
-                      <a:solidFill>
-                        <a:srgbClr val="DCD6C9"/>
-                      </a:solidFill>
-                      <a:prstDash val="solid"/>
-                      <a:round/>
-                      <a:headEnd type="none" w="med" len="med"/>
-                      <a:tailEnd type="none" w="med" len="med"/>
-                    </a:lnL>
-                    <a:lnR w="6350" cap="flat" cmpd="sng" algn="ctr">
-                      <a:solidFill>
-                        <a:srgbClr val="DCD6C9"/>
-                      </a:solidFill>
-                      <a:prstDash val="solid"/>
-                      <a:round/>
-                      <a:headEnd type="none" w="med" len="med"/>
-                      <a:tailEnd type="none" w="med" len="med"/>
-                    </a:lnR>
-                    <a:lnT w="6350" cap="flat" cmpd="sng" algn="ctr">
-                      <a:solidFill>
-                        <a:srgbClr val="DCD6C9"/>
-                      </a:solidFill>
-                      <a:prstDash val="solid"/>
-                      <a:round/>
-                      <a:headEnd type="none" w="med" len="med"/>
-                      <a:tailEnd type="none" w="med" len="med"/>
-                    </a:lnT>
-                    <a:lnB w="6350" cap="flat" cmpd="sng" algn="ctr">
-                      <a:solidFill>
-                        <a:srgbClr val="DCD6C9"/>
-                      </a:solidFill>
-                      <a:prstDash val="solid"/>
-                      <a:round/>
-                      <a:headEnd type="none" w="med" len="med"/>
-                      <a:tailEnd type="none" w="med" len="med"/>
-                    </a:lnB>
-                    <a:solidFill>
-                      <a:srgbClr val="FFFFFF"/>
-                    </a:solidFill>
-                  </a:tcPr>
-                </a:tc>
-                <a:tc>
-                  <a:txBody>
-                    <a:bodyPr/>
-                    <a:lstStyle/>
-                    <a:p>
-                      <a:pPr indent="0" marL="0">
-                        <a:buNone/>
-                      </a:pPr>
-                      <a:r>
-                        <a:rPr lang="en-US" sz="1200" dirty="0">
-                          <a:solidFill>
-                            <a:srgbClr val="1B2426"/>
-                          </a:solidFill>
-                          <a:latin typeface="맑은 고딕" pitchFamily="34" charset="0"/>
-                          <a:ea typeface="맑은 고딕" pitchFamily="34" charset="-122"/>
-                          <a:cs typeface="맑은 고딕" pitchFamily="34" charset="-120"/>
-                        </a:rPr>
-                        <a:t>약 8,300만 원</a:t>
-                      </a:r>
-                      <a:endParaRPr lang="en-US" sz="1200" dirty="0">
-                        <a:latin typeface="맑은 고딕" charset="0"/>
-                        <a:ea typeface="맑은 고딕" charset="0"/>
-                        <a:cs typeface="맑은 고딕" charset="0"/>
-                      </a:endParaRPr>
-                    </a:p>
-                  </a:txBody>
-                  <a:tcPr marL="88900" marR="88900" marT="50800" marB="50800" anchor="ctr">
-                    <a:lnL w="6350" cap="flat" cmpd="sng" algn="ctr">
-                      <a:solidFill>
-                        <a:srgbClr val="DCD6C9"/>
-                      </a:solidFill>
-                      <a:prstDash val="solid"/>
-                      <a:round/>
-                      <a:headEnd type="none" w="med" len="med"/>
-                      <a:tailEnd type="none" w="med" len="med"/>
-                    </a:lnL>
-                    <a:lnR w="6350" cap="flat" cmpd="sng" algn="ctr">
-                      <a:solidFill>
-                        <a:srgbClr val="DCD6C9"/>
-                      </a:solidFill>
-                      <a:prstDash val="solid"/>
-                      <a:round/>
-                      <a:headEnd type="none" w="med" len="med"/>
-                      <a:tailEnd type="none" w="med" len="med"/>
-                    </a:lnR>
-                    <a:lnT w="6350" cap="flat" cmpd="sng" algn="ctr">
-                      <a:solidFill>
-                        <a:srgbClr val="DCD6C9"/>
-                      </a:solidFill>
-                      <a:prstDash val="solid"/>
-                      <a:round/>
-                      <a:headEnd type="none" w="med" len="med"/>
-                      <a:tailEnd type="none" w="med" len="med"/>
-                    </a:lnT>
-                    <a:lnB w="6350" cap="flat" cmpd="sng" algn="ctr">
-                      <a:solidFill>
-                        <a:srgbClr val="DCD6C9"/>
-                      </a:solidFill>
-                      <a:prstDash val="solid"/>
-                      <a:round/>
-                      <a:headEnd type="none" w="med" len="med"/>
-                      <a:tailEnd type="none" w="med" len="med"/>
-                    </a:lnB>
-                    <a:solidFill>
-                      <a:srgbClr val="FFFFFF"/>
-                    </a:solidFill>
-                  </a:tcPr>
-                </a:tc>
-                <a:tc>
-                  <a:txBody>
-                    <a:bodyPr/>
-                    <a:lstStyle/>
-                    <a:p>
-                      <a:pPr indent="0" marL="0">
-                        <a:buNone/>
-                      </a:pPr>
-                      <a:r>
-                        <a:rPr lang="en-US" sz="1200" dirty="0">
-                          <a:solidFill>
-                            <a:srgbClr val="1B2426"/>
-                          </a:solidFill>
-                          <a:latin typeface="맑은 고딕" pitchFamily="34" charset="0"/>
-                          <a:ea typeface="맑은 고딕" pitchFamily="34" charset="-122"/>
-                          <a:cs typeface="맑은 고딕" pitchFamily="34" charset="-120"/>
-                        </a:rPr>
-                        <a:t>약 5,810만~6,200만 원</a:t>
-                      </a:r>
-                      <a:endParaRPr lang="en-US" sz="1200" dirty="0">
-                        <a:latin typeface="맑은 고딕" charset="0"/>
-                        <a:ea typeface="맑은 고딕" charset="0"/>
-                        <a:cs typeface="맑은 고딕" charset="0"/>
-                      </a:endParaRPr>
-                    </a:p>
-                  </a:txBody>
-                  <a:tcPr marL="88900" marR="88900" marT="50800" marB="50800" anchor="ctr">
-                    <a:lnL w="6350" cap="flat" cmpd="sng" algn="ctr">
-                      <a:solidFill>
-                        <a:srgbClr val="DCD6C9"/>
-                      </a:solidFill>
-                      <a:prstDash val="solid"/>
-                      <a:round/>
-                      <a:headEnd type="none" w="med" len="med"/>
-                      <a:tailEnd type="none" w="med" len="med"/>
-                    </a:lnL>
-                    <a:lnR w="6350" cap="flat" cmpd="sng" algn="ctr">
-                      <a:solidFill>
-                        <a:srgbClr val="DCD6C9"/>
-                      </a:solidFill>
-                      <a:prstDash val="solid"/>
-                      <a:round/>
-                      <a:headEnd type="none" w="med" len="med"/>
-                      <a:tailEnd type="none" w="med" len="med"/>
-                    </a:lnR>
-                    <a:lnT w="6350" cap="flat" cmpd="sng" algn="ctr">
-                      <a:solidFill>
-                        <a:srgbClr val="DCD6C9"/>
-                      </a:solidFill>
-                      <a:prstDash val="solid"/>
-                      <a:round/>
-                      <a:headEnd type="none" w="med" len="med"/>
-                      <a:tailEnd type="none" w="med" len="med"/>
-                    </a:lnT>
-                    <a:lnB w="6350" cap="flat" cmpd="sng" algn="ctr">
-                      <a:solidFill>
-                        <a:srgbClr val="DCD6C9"/>
-                      </a:solidFill>
-                      <a:prstDash val="solid"/>
-                      <a:round/>
-                      <a:headEnd type="none" w="med" len="med"/>
-                      <a:tailEnd type="none" w="med" len="med"/>
-                    </a:lnB>
-                    <a:solidFill>
-                      <a:srgbClr val="FFFFFF"/>
-                    </a:solidFill>
-                  </a:tcPr>
-                </a:tc>
               </a:tr>
             </a:tbl>
           </a:graphicData>
@@ -25781,7 +27704,219 @@
       </p:graphicFrame>
       <p:sp>
         <p:nvSpPr>
-          <p:cNvPr id="8" name="Text 5"/>
+          <p:cNvPr id="8" name="Shape 5"/>
+          <p:cNvSpPr/>
+          <p:nvPr/>
+        </p:nvSpPr>
+        <p:spPr>
+          <a:xfrm>
+            <a:off x="640080" y="5047488"/>
+            <a:ext cx="5358384" cy="786384"/>
+          </a:xfrm>
+          <a:prstGeom prst="roundRect">
+            <a:avLst>
+              <a:gd name="adj" fmla="val 9302"/>
+            </a:avLst>
+          </a:prstGeom>
+          <a:solidFill>
+            <a:srgbClr val="F5EEDC"/>
+          </a:solidFill>
+          <a:ln/>
+        </p:spPr>
+      </p:sp>
+      <p:sp>
+        <p:nvSpPr>
+          <p:cNvPr id="9" name="Text 6"/>
+          <p:cNvSpPr txBox="1"/>
+          <p:nvPr/>
+        </p:nvSpPr>
+        <p:spPr>
+          <a:xfrm>
+            <a:off x="914400" y="5138928"/>
+            <a:ext cx="4809744" cy="237744"/>
+          </a:xfrm>
+          <a:prstGeom prst="rect">
+            <a:avLst/>
+          </a:prstGeom>
+          <a:noFill/>
+          <a:ln/>
+        </p:spPr>
+        <p:txBody>
+          <a:bodyPr wrap="square" lIns="0" tIns="0" rIns="0" bIns="0" rtlCol="0" anchor="t"/>
+          <a:lstStyle/>
+          <a:p>
+            <a:pPr algn="l" indent="0" marL="0">
+              <a:lnSpc>
+                <a:spcPct val="122000"/>
+              </a:lnSpc>
+              <a:buNone/>
+            </a:pPr>
+            <a:r>
+              <a:rPr lang="en-US" sz="1250" b="1" dirty="0">
+                <a:solidFill>
+                  <a:srgbClr val="C08A2E"/>
+                </a:solidFill>
+                <a:latin typeface="맑은 고딕" pitchFamily="34" charset="0"/>
+                <a:ea typeface="맑은 고딕" pitchFamily="34" charset="-122"/>
+                <a:cs typeface="맑은 고딕" pitchFamily="34" charset="-120"/>
+              </a:rPr>
+              <a:t>1편의 결론 — 선웨이만 학위증이 두 장입니다</a:t>
+            </a:r>
+            <a:endParaRPr lang="en-US" sz="1250" dirty="0"/>
+          </a:p>
+        </p:txBody>
+      </p:sp>
+      <p:sp>
+        <p:nvSpPr>
+          <p:cNvPr id="10" name="Text 7"/>
+          <p:cNvSpPr txBox="1"/>
+          <p:nvPr/>
+        </p:nvSpPr>
+        <p:spPr>
+          <a:xfrm>
+            <a:off x="914400" y="5394960"/>
+            <a:ext cx="4809744" cy="402336"/>
+          </a:xfrm>
+          <a:prstGeom prst="rect">
+            <a:avLst/>
+          </a:prstGeom>
+          <a:noFill/>
+          <a:ln/>
+        </p:spPr>
+        <p:txBody>
+          <a:bodyPr wrap="square" lIns="0" tIns="0" rIns="0" bIns="0" rtlCol="0" anchor="t"/>
+          <a:lstStyle/>
+          <a:p>
+            <a:pPr algn="l" indent="0" marL="0">
+              <a:lnSpc>
+                <a:spcPct val="135000"/>
+              </a:lnSpc>
+              <a:buNone/>
+            </a:pPr>
+            <a:r>
+              <a:rPr lang="en-US" sz="1100" dirty="0">
+                <a:solidFill>
+                  <a:srgbClr val="1B2426"/>
+                </a:solidFill>
+                <a:latin typeface="맑은 고딕" pitchFamily="34" charset="0"/>
+                <a:ea typeface="맑은 고딕" pitchFamily="34" charset="-122"/>
+                <a:cs typeface="맑은 고딕" pitchFamily="34" charset="-120"/>
+              </a:rPr>
+              <a:t>같은 4년, 같은 학비로 선웨이 BEng와 영국 랭커스터 MEng를 함께 받습니다. 공학 지망이면서 예산이 빠듯하다면 가장 유리한 선택지입니다.</a:t>
+            </a:r>
+            <a:endParaRPr lang="en-US" sz="1100" dirty="0"/>
+          </a:p>
+        </p:txBody>
+      </p:sp>
+      <p:sp>
+        <p:nvSpPr>
+          <p:cNvPr id="11" name="Shape 8"/>
+          <p:cNvSpPr/>
+          <p:nvPr/>
+        </p:nvSpPr>
+        <p:spPr>
+          <a:xfrm>
+            <a:off x="6190488" y="5047488"/>
+            <a:ext cx="5358384" cy="786384"/>
+          </a:xfrm>
+          <a:prstGeom prst="roundRect">
+            <a:avLst>
+              <a:gd name="adj" fmla="val 9302"/>
+            </a:avLst>
+          </a:prstGeom>
+          <a:solidFill>
+            <a:srgbClr val="F7EBE6"/>
+          </a:solidFill>
+          <a:ln/>
+        </p:spPr>
+      </p:sp>
+      <p:sp>
+        <p:nvSpPr>
+          <p:cNvPr id="12" name="Text 9"/>
+          <p:cNvSpPr txBox="1"/>
+          <p:nvPr/>
+        </p:nvSpPr>
+        <p:spPr>
+          <a:xfrm>
+            <a:off x="6464808" y="5138928"/>
+            <a:ext cx="4809744" cy="237744"/>
+          </a:xfrm>
+          <a:prstGeom prst="rect">
+            <a:avLst/>
+          </a:prstGeom>
+          <a:noFill/>
+          <a:ln/>
+        </p:spPr>
+        <p:txBody>
+          <a:bodyPr wrap="square" lIns="0" tIns="0" rIns="0" bIns="0" rtlCol="0" anchor="t"/>
+          <a:lstStyle/>
+          <a:p>
+            <a:pPr algn="l" indent="0" marL="0">
+              <a:lnSpc>
+                <a:spcPct val="122000"/>
+              </a:lnSpc>
+              <a:buNone/>
+            </a:pPr>
+            <a:r>
+              <a:rPr lang="en-US" sz="1250" b="1" dirty="0">
+                <a:solidFill>
+                  <a:srgbClr val="A8412C"/>
+                </a:solidFill>
+                <a:latin typeface="맑은 고딕" pitchFamily="34" charset="0"/>
+                <a:ea typeface="맑은 고딕" pitchFamily="34" charset="-122"/>
+                <a:cs typeface="맑은 고딕" pitchFamily="34" charset="-120"/>
+              </a:rPr>
+              <a:t>학위 이름보다 인증(Accreditation)을 보십시오</a:t>
+            </a:r>
+            <a:endParaRPr lang="en-US" sz="1250" dirty="0"/>
+          </a:p>
+        </p:txBody>
+      </p:sp>
+      <p:sp>
+        <p:nvSpPr>
+          <p:cNvPr id="13" name="Text 10"/>
+          <p:cNvSpPr txBox="1"/>
+          <p:nvPr/>
+        </p:nvSpPr>
+        <p:spPr>
+          <a:xfrm>
+            <a:off x="6464808" y="5394960"/>
+            <a:ext cx="4809744" cy="402336"/>
+          </a:xfrm>
+          <a:prstGeom prst="rect">
+            <a:avLst/>
+          </a:prstGeom>
+          <a:noFill/>
+          <a:ln/>
+        </p:spPr>
+        <p:txBody>
+          <a:bodyPr wrap="square" lIns="0" tIns="0" rIns="0" bIns="0" rtlCol="0" anchor="t"/>
+          <a:lstStyle/>
+          <a:p>
+            <a:pPr algn="l" indent="0" marL="0">
+              <a:lnSpc>
+                <a:spcPct val="135000"/>
+              </a:lnSpc>
+              <a:buNone/>
+            </a:pPr>
+            <a:r>
+              <a:rPr lang="en-US" sz="1100" dirty="0">
+                <a:solidFill>
+                  <a:srgbClr val="1B2426"/>
+                </a:solidFill>
+                <a:latin typeface="맑은 고딕" pitchFamily="34" charset="0"/>
+                <a:ea typeface="맑은 고딕" pitchFamily="34" charset="-122"/>
+                <a:cs typeface="맑은 고딕" pitchFamily="34" charset="-120"/>
+              </a:rPr>
+              <a:t>엔지니어 등록과 해외 취업을 가르는 것은 학위 명칭이 아니라 EAC/BEM · IET · IChemE 인증과 워싱턴 어코드 가입 여부입니다.</a:t>
+            </a:r>
+            <a:endParaRPr lang="en-US" sz="1100" dirty="0"/>
+          </a:p>
+        </p:txBody>
+      </p:sp>
+      <p:sp>
+        <p:nvSpPr>
+          <p:cNvPr id="14" name="Text 11"/>
           <p:cNvSpPr txBox="1"/>
           <p:nvPr/>
         </p:nvSpPr>
@@ -25815,7 +27950,7 @@
                 <a:ea typeface="맑은 고딕" pitchFamily="34" charset="-122"/>
                 <a:cs typeface="맑은 고딕" pitchFamily="34" charset="-120"/>
               </a:rPr>
-              <a:t>학비만 놓고 보면 선웨이가 낮습니다. 다만 강세 전공이 다릅니다 — 호텔·디자인이면 테일러스, 회계·금융·CS면 선웨이입니다.</a:t>
+              <a:t>출처: 테일러스 School of Engineering (화학·전기전자·기계 EAC/BEM 인정 — 메카트로닉스는 별도 확인 필요) · 선웨이 Faculty of Engineering and Technology · Monash UG Prospectus 2027 p.8 · UNM 브로셔 p.18  |  호주 자격체계(AQF)는 학사 우등 8등급 · 석사 9등급 · 박사 10등급입니다.</a:t>
             </a:r>
             <a:endParaRPr lang="en-US" sz="900" dirty="0"/>
           </a:p>
